--- a/cnagent_最重要的三个问题.pptx
+++ b/cnagent_最重要的三个问题.pptx
@@ -6,8 +6,8 @@
   </p:sldMasterIdLst>
   <p:sldIdLst>
     <p:sldId id="256" r:id="rId7"/>
-    <p:sldId id="257" r:id="rId9"/>
-    <p:sldId id="258" r:id="rId10"/>
+    <p:sldId id="257" r:id="rId8"/>
+    <p:sldId id="258" r:id="rId9"/>
   </p:sldIdLst>
   <p:sldSz cx="12191695" cy="6858000" type="screen4x3"/>
   <p:notesSz cx="6858000" cy="9144000"/>
@@ -107,811 +107,6 @@
     </a:lvl9pPr>
   </p:defaultTextStyle>
 </p:presentation>
-</file>
-
-<file path=ppt/notesMasters/notesMaster1.xml><?xml version="1.0" encoding="utf-8"?>
-<p:notesMaster xmlns:a="http://schemas.openxmlformats.org/drawingml/2006/main" xmlns:p="http://schemas.openxmlformats.org/presentationml/2006/main" xmlns:r="http://schemas.openxmlformats.org/officeDocument/2006/relationships">
-  <p:cSld>
-    <p:bg>
-      <p:bgRef idx="1001">
-        <a:schemeClr val="bg1"/>
-      </p:bgRef>
-    </p:bg>
-    <p:spTree>
-      <p:nvGrpSpPr>
-        <p:cNvPr id="1" name=""/>
-        <p:cNvGrpSpPr/>
-        <p:nvPr/>
-      </p:nvGrpSpPr>
-      <p:grpSpPr>
-        <a:xfrm>
-          <a:off x="0" y="0"/>
-          <a:ext cx="0" cy="0"/>
-          <a:chOff x="0" y="0"/>
-          <a:chExt cx="0" cy="0"/>
-        </a:xfrm>
-      </p:grpSpPr>
-      <p:sp>
-        <p:nvSpPr>
-          <p:cNvPr id="2" name="Header Placeholder 1"/>
-          <p:cNvSpPr>
-            <a:spLocks noGrp="1"/>
-          </p:cNvSpPr>
-          <p:nvPr>
-            <p:ph type="hdr" sz="quarter"/>
-          </p:nvPr>
-        </p:nvSpPr>
-        <p:spPr>
-          <a:xfrm>
-            <a:off x="0" y="0"/>
-            <a:ext cx="2971800" cy="457200"/>
-          </a:xfrm>
-          <a:prstGeom prst="rect">
-            <a:avLst/>
-          </a:prstGeom>
-        </p:spPr>
-        <p:txBody>
-          <a:bodyPr vert="horz" lIns="91440" tIns="45720" rIns="91440" bIns="45720" rtlCol="0"/>
-          <a:lstStyle>
-            <a:lvl1pPr algn="l">
-              <a:defRPr sz="1200"/>
-            </a:lvl1pPr>
-          </a:lstStyle>
-          <a:p>
-            <a:endParaRPr lang="en-US"/>
-          </a:p>
-        </p:txBody>
-      </p:sp>
-      <p:sp>
-        <p:nvSpPr>
-          <p:cNvPr id="3" name="Date Placeholder 2"/>
-          <p:cNvSpPr>
-            <a:spLocks noGrp="1"/>
-          </p:cNvSpPr>
-          <p:nvPr>
-            <p:ph type="dt" idx="1"/>
-          </p:nvPr>
-        </p:nvSpPr>
-        <p:spPr>
-          <a:xfrm>
-            <a:off x="3884613" y="0"/>
-            <a:ext cx="2971800" cy="457200"/>
-          </a:xfrm>
-          <a:prstGeom prst="rect">
-            <a:avLst/>
-          </a:prstGeom>
-        </p:spPr>
-        <p:txBody>
-          <a:bodyPr vert="horz" lIns="91440" tIns="45720" rIns="91440" bIns="45720" rtlCol="0"/>
-          <a:lstStyle>
-            <a:lvl1pPr algn="r">
-              <a:defRPr sz="1200"/>
-            </a:lvl1pPr>
-          </a:lstStyle>
-          <a:p>
-            <a:fld id="{0F89C1C7-3DCD-1040-A9CF-14679D8B5DDD}" type="datetimeFigureOut">
-              <a:rPr lang="en-US" smtClean="0"/>
-              <a:t>10/17/16</a:t>
-            </a:fld>
-            <a:endParaRPr lang="en-US"/>
-          </a:p>
-        </p:txBody>
-      </p:sp>
-      <p:sp>
-        <p:nvSpPr>
-          <p:cNvPr id="4" name="Slide Image Placeholder 3"/>
-          <p:cNvSpPr>
-            <a:spLocks noGrp="1" noRot="1" noChangeAspect="1"/>
-          </p:cNvSpPr>
-          <p:nvPr>
-            <p:ph type="sldImg" idx="2"/>
-          </p:nvPr>
-        </p:nvSpPr>
-        <p:spPr>
-          <a:xfrm>
-            <a:off x="1143000" y="685800"/>
-            <a:ext cx="4572000" cy="3429000"/>
-          </a:xfrm>
-          <a:prstGeom prst="rect">
-            <a:avLst/>
-          </a:prstGeom>
-          <a:noFill/>
-          <a:ln w="12700">
-            <a:solidFill>
-              <a:prstClr val="black"/>
-            </a:solidFill>
-          </a:ln>
-        </p:spPr>
-        <p:txBody>
-          <a:bodyPr vert="horz" lIns="91440" tIns="45720" rIns="91440" bIns="45720" rtlCol="0" anchor="ctr"/>
-          <a:lstStyle/>
-          <a:p>
-            <a:endParaRPr lang="en-US"/>
-          </a:p>
-        </p:txBody>
-      </p:sp>
-      <p:sp>
-        <p:nvSpPr>
-          <p:cNvPr id="5" name="Notes Placeholder 4"/>
-          <p:cNvSpPr>
-            <a:spLocks noGrp="1"/>
-          </p:cNvSpPr>
-          <p:nvPr>
-            <p:ph type="body" sz="quarter" idx="3"/>
-          </p:nvPr>
-        </p:nvSpPr>
-        <p:spPr>
-          <a:xfrm>
-            <a:off x="685800" y="4343400"/>
-            <a:ext cx="5486400" cy="4114800"/>
-          </a:xfrm>
-          <a:prstGeom prst="rect">
-            <a:avLst/>
-          </a:prstGeom>
-        </p:spPr>
-        <p:txBody>
-          <a:bodyPr vert="horz" lIns="91440" tIns="45720" rIns="91440" bIns="45720" rtlCol="0"/>
-          <a:lstStyle/>
-          <a:p>
-            <a:pPr lvl="0"/>
-            <a:r>
-              <a:rPr lang="en-US" smtClean="0"/>
-              <a:t>Click to edit Master text styles</a:t>
-            </a:r>
-          </a:p>
-          <a:p>
-            <a:pPr lvl="1"/>
-            <a:r>
-              <a:rPr lang="en-US" smtClean="0"/>
-              <a:t>Second level</a:t>
-            </a:r>
-          </a:p>
-          <a:p>
-            <a:pPr lvl="2"/>
-            <a:r>
-              <a:rPr lang="en-US" smtClean="0"/>
-              <a:t>Third level</a:t>
-            </a:r>
-          </a:p>
-          <a:p>
-            <a:pPr lvl="3"/>
-            <a:r>
-              <a:rPr lang="en-US" smtClean="0"/>
-              <a:t>Fourth level</a:t>
-            </a:r>
-          </a:p>
-          <a:p>
-            <a:pPr lvl="4"/>
-            <a:r>
-              <a:rPr lang="en-US" smtClean="0"/>
-              <a:t>Fifth level</a:t>
-            </a:r>
-            <a:endParaRPr lang="en-US"/>
-          </a:p>
-        </p:txBody>
-      </p:sp>
-      <p:sp>
-        <p:nvSpPr>
-          <p:cNvPr id="6" name="Footer Placeholder 5"/>
-          <p:cNvSpPr>
-            <a:spLocks noGrp="1"/>
-          </p:cNvSpPr>
-          <p:nvPr>
-            <p:ph type="ftr" sz="quarter" idx="4"/>
-          </p:nvPr>
-        </p:nvSpPr>
-        <p:spPr>
-          <a:xfrm>
-            <a:off x="0" y="8685213"/>
-            <a:ext cx="2971800" cy="457200"/>
-          </a:xfrm>
-          <a:prstGeom prst="rect">
-            <a:avLst/>
-          </a:prstGeom>
-        </p:spPr>
-        <p:txBody>
-          <a:bodyPr vert="horz" lIns="91440" tIns="45720" rIns="91440" bIns="45720" rtlCol="0" anchor="b"/>
-          <a:lstStyle>
-            <a:lvl1pPr algn="l">
-              <a:defRPr sz="1200"/>
-            </a:lvl1pPr>
-          </a:lstStyle>
-          <a:p>
-            <a:endParaRPr lang="en-US"/>
-          </a:p>
-        </p:txBody>
-      </p:sp>
-      <p:sp>
-        <p:nvSpPr>
-          <p:cNvPr id="7" name="Slide Number Placeholder 6"/>
-          <p:cNvSpPr>
-            <a:spLocks noGrp="1"/>
-          </p:cNvSpPr>
-          <p:nvPr>
-            <p:ph type="sldNum" sz="quarter" idx="5"/>
-          </p:nvPr>
-        </p:nvSpPr>
-        <p:spPr>
-          <a:xfrm>
-            <a:off x="3884613" y="8685213"/>
-            <a:ext cx="2971800" cy="457200"/>
-          </a:xfrm>
-          <a:prstGeom prst="rect">
-            <a:avLst/>
-          </a:prstGeom>
-        </p:spPr>
-        <p:txBody>
-          <a:bodyPr vert="horz" lIns="91440" tIns="45720" rIns="91440" bIns="45720" rtlCol="0" anchor="b"/>
-          <a:lstStyle>
-            <a:lvl1pPr algn="r">
-              <a:defRPr sz="1200"/>
-            </a:lvl1pPr>
-          </a:lstStyle>
-          <a:p>
-            <a:fld id="{BB5E49A5-4136-284D-997B-48E1D791AD67}" type="slidenum">
-              <a:rPr lang="en-US" smtClean="0"/>
-              <a:t>‹#›</a:t>
-            </a:fld>
-            <a:endParaRPr lang="en-US"/>
-          </a:p>
-        </p:txBody>
-      </p:sp>
-    </p:spTree>
-    <p:extLst>
-      <p:ext uri="{BB962C8B-B14F-4D97-AF65-F5344CB8AC3E}">
-        <p14:creationId xmlns:p14="http://schemas.microsoft.com/office/powerpoint/2010/main" val="2623252185"/>
-      </p:ext>
-    </p:extLst>
-  </p:cSld>
-  <p:clrMap bg1="lt1" tx1="dk1" bg2="lt2" tx2="dk2" accent1="accent1" accent2="accent2" accent3="accent3" accent4="accent4" accent5="accent5" accent6="accent6" hlink="hlink" folHlink="folHlink"/>
-  <p:notesStyle>
-    <a:lvl1pPr marL="0" algn="l" defTabSz="457200" rtl="0" eaLnBrk="1" latinLnBrk="0" hangingPunct="1">
-      <a:defRPr sz="1200" kern="1200">
-        <a:solidFill>
-          <a:schemeClr val="tx1"/>
-        </a:solidFill>
-        <a:latin typeface="Microsoft YaHei"/>
-        <a:ea typeface="Microsoft YaHei"/>
-        <a:cs typeface="Microsoft YaHei"/>
-      </a:defRPr>
-    </a:lvl1pPr>
-    <a:lvl2pPr marL="457200" algn="l" defTabSz="457200" rtl="0" eaLnBrk="1" latinLnBrk="0" hangingPunct="1">
-      <a:defRPr sz="1200" kern="1200">
-        <a:solidFill>
-          <a:schemeClr val="tx1"/>
-        </a:solidFill>
-        <a:latin typeface="Microsoft YaHei"/>
-        <a:ea typeface="Microsoft YaHei"/>
-        <a:cs typeface="Microsoft YaHei"/>
-      </a:defRPr>
-    </a:lvl2pPr>
-    <a:lvl3pPr marL="914400" algn="l" defTabSz="457200" rtl="0" eaLnBrk="1" latinLnBrk="0" hangingPunct="1">
-      <a:defRPr sz="1200" kern="1200">
-        <a:solidFill>
-          <a:schemeClr val="tx1"/>
-        </a:solidFill>
-        <a:latin typeface="Microsoft YaHei"/>
-        <a:ea typeface="Microsoft YaHei"/>
-        <a:cs typeface="Microsoft YaHei"/>
-      </a:defRPr>
-    </a:lvl3pPr>
-    <a:lvl4pPr marL="1371600" algn="l" defTabSz="457200" rtl="0" eaLnBrk="1" latinLnBrk="0" hangingPunct="1">
-      <a:defRPr sz="1200" kern="1200">
-        <a:solidFill>
-          <a:schemeClr val="tx1"/>
-        </a:solidFill>
-        <a:latin typeface="Microsoft YaHei"/>
-        <a:ea typeface="Microsoft YaHei"/>
-        <a:cs typeface="Microsoft YaHei"/>
-      </a:defRPr>
-    </a:lvl4pPr>
-    <a:lvl5pPr marL="1828800" algn="l" defTabSz="457200" rtl="0" eaLnBrk="1" latinLnBrk="0" hangingPunct="1">
-      <a:defRPr sz="1200" kern="1200">
-        <a:solidFill>
-          <a:schemeClr val="tx1"/>
-        </a:solidFill>
-        <a:latin typeface="Microsoft YaHei"/>
-        <a:ea typeface="Microsoft YaHei"/>
-        <a:cs typeface="Microsoft YaHei"/>
-      </a:defRPr>
-    </a:lvl5pPr>
-    <a:lvl6pPr marL="2286000" algn="l" defTabSz="457200" rtl="0" eaLnBrk="1" latinLnBrk="0" hangingPunct="1">
-      <a:defRPr sz="1200" kern="1200">
-        <a:solidFill>
-          <a:schemeClr val="tx1"/>
-        </a:solidFill>
-        <a:latin typeface="Microsoft YaHei"/>
-        <a:ea typeface="Microsoft YaHei"/>
-        <a:cs typeface="Microsoft YaHei"/>
-      </a:defRPr>
-    </a:lvl6pPr>
-    <a:lvl7pPr marL="2743200" algn="l" defTabSz="457200" rtl="0" eaLnBrk="1" latinLnBrk="0" hangingPunct="1">
-      <a:defRPr sz="1200" kern="1200">
-        <a:solidFill>
-          <a:schemeClr val="tx1"/>
-        </a:solidFill>
-        <a:latin typeface="Microsoft YaHei"/>
-        <a:ea typeface="Microsoft YaHei"/>
-        <a:cs typeface="Microsoft YaHei"/>
-      </a:defRPr>
-    </a:lvl7pPr>
-    <a:lvl8pPr marL="3200400" algn="l" defTabSz="457200" rtl="0" eaLnBrk="1" latinLnBrk="0" hangingPunct="1">
-      <a:defRPr sz="1200" kern="1200">
-        <a:solidFill>
-          <a:schemeClr val="tx1"/>
-        </a:solidFill>
-        <a:latin typeface="Microsoft YaHei"/>
-        <a:ea typeface="Microsoft YaHei"/>
-        <a:cs typeface="Microsoft YaHei"/>
-      </a:defRPr>
-    </a:lvl8pPr>
-    <a:lvl9pPr marL="3657600" algn="l" defTabSz="457200" rtl="0" eaLnBrk="1" latinLnBrk="0" hangingPunct="1">
-      <a:defRPr sz="1200" kern="1200">
-        <a:solidFill>
-          <a:schemeClr val="tx1"/>
-        </a:solidFill>
-        <a:latin typeface="Microsoft YaHei"/>
-        <a:ea typeface="Microsoft YaHei"/>
-        <a:cs typeface="Microsoft YaHei"/>
-      </a:defRPr>
-    </a:lvl9pPr>
-  </p:notesStyle>
-</p:notesMaster>
-</file>
-
-<file path=ppt/notesSlides/notesSlide1.xml><?xml version="1.0" encoding="utf-8"?>
-<p:notes xmlns:a="http://schemas.openxmlformats.org/drawingml/2006/main" xmlns:p="http://schemas.openxmlformats.org/presentationml/2006/main" xmlns:r="http://schemas.openxmlformats.org/officeDocument/2006/relationships">
-  <p:cSld>
-    <p:spTree>
-      <p:nvGrpSpPr>
-        <p:cNvPr id="1" name=""/>
-        <p:cNvGrpSpPr/>
-        <p:nvPr/>
-      </p:nvGrpSpPr>
-      <p:grpSpPr>
-        <a:xfrm>
-          <a:off x="0" y="0"/>
-          <a:ext cx="0" cy="0"/>
-          <a:chOff x="0" y="0"/>
-          <a:chExt cx="0" cy="0"/>
-        </a:xfrm>
-      </p:grpSpPr>
-      <p:sp>
-        <p:nvSpPr>
-          <p:cNvPr id="2" name="Slide Image Placeholder 1"/>
-          <p:cNvSpPr>
-            <a:spLocks noGrp="1"/>
-          </p:cNvSpPr>
-          <p:nvPr>
-            <p:ph type="sldImg" idx="2"/>
-          </p:nvPr>
-        </p:nvSpPr>
-        <p:spPr/>
-      </p:sp>
-      <p:sp>
-        <p:nvSpPr>
-          <p:cNvPr id="3" name="Notes Placeholder 2"/>
-          <p:cNvSpPr>
-            <a:spLocks noGrp="1"/>
-          </p:cNvSpPr>
-          <p:nvPr>
-            <p:ph type="body" idx="3" sz="quarter"/>
-          </p:nvPr>
-        </p:nvSpPr>
-        <p:spPr/>
-        <p:txBody>
-          <a:bodyPr/>
-          <a:lstStyle/>
-          <a:p>
-            <a:r>
-              <a:rPr sz="1100" b="0" lang="zh-CN">
-                <a:solidFill>
-                  <a:srgbClr val="1B242F"/>
-                </a:solidFill>
-                <a:latin typeface="Microsoft YaHei"/>
-                <a:ea typeface="Microsoft YaHei"/>
-                <a:cs typeface="Microsoft YaHei"/>
-              </a:rPr>
-              <a:t>证据边界：</a:t>
-            </a:r>
-          </a:p>
-          <a:p>
-            <a:r>
-              <a:rPr sz="1100" b="0" lang="zh-CN">
-                <a:solidFill>
-                  <a:srgbClr val="1B242F"/>
-                </a:solidFill>
-                <a:latin typeface="Microsoft YaHei"/>
-                <a:ea typeface="Microsoft YaHei"/>
-                <a:cs typeface="Microsoft YaHei"/>
-              </a:rPr>
-              <a:t>1. inode 快照来自 inode_snapshot.json，采集于 2026-09-09 15:15 +08:00。</a:t>
-            </a:r>
-          </a:p>
-          <a:p>
-            <a:r>
-              <a:rPr sz="1100" b="0" lang="zh-CN">
-                <a:solidFill>
-                  <a:srgbClr val="1B242F"/>
-                </a:solidFill>
-                <a:latin typeface="Microsoft YaHei"/>
-                <a:ea typeface="Microsoft YaHei"/>
-                <a:cs typeface="Microsoft YaHei"/>
-              </a:rPr>
-              <a:t>2. Job …7x4W：09-08 19:21:54 cleaned Job Task temp directories removed=69 skipped=0；19:22:28 pruned artifacts cnagent-skill removed=13 skipped=0。removed 是路径数量，不是文件或 inode 数量。</a:t>
-            </a:r>
-          </a:p>
-          <a:p>
-            <a:r>
-              <a:rPr sz="1100" b="0" lang="zh-CN">
-                <a:solidFill>
-                  <a:srgbClr val="1B242F"/>
-                </a:solidFill>
-                <a:latin typeface="Microsoft YaHei"/>
-                <a:ea typeface="Microsoft YaHei"/>
-                <a:cs typeface="Microsoft YaHei"/>
-              </a:rPr>
-              <a:t>3. 5cc0a1f (2026-05-25): support delete small files；3aeb40c (2026-05-11): trace 从复制改为相对 symlink。</a:t>
-            </a:r>
-          </a:p>
-          <a:p>
-            <a:r>
-              <a:rPr sz="1100" b="0" lang="zh-CN">
-                <a:solidFill>
-                  <a:srgbClr val="1B242F"/>
-                </a:solidFill>
-                <a:latin typeface="Microsoft YaHei"/>
-                <a:ea typeface="Microsoft YaHei"/>
-                <a:cs typeface="Microsoft YaHei"/>
-              </a:rPr>
-              <a:t>4. 当前快照是在已有清理策略下观测到的状态。尚无修复前后同一批 Job 的 inode 配对计量，不声称量化下降幅度。</a:t>
-            </a:r>
-          </a:p>
-          <a:p>
-            <a:r>
-              <a:rPr sz="1100" b="0" lang="zh-CN">
-                <a:solidFill>
-                  <a:srgbClr val="1B242F"/>
-                </a:solidFill>
-                <a:latin typeface="Microsoft YaHei"/>
-                <a:ea typeface="Microsoft YaHei"/>
-                <a:cs typeface="Microsoft YaHei"/>
-              </a:rPr>
-              <a:t>5. 仓库目录按注册策略删除；default会在整个Job root按垃圾后缀递归清理。.cnagent_tmp即使artifact_retention=all仍清。当前值不是历史故障峰值。</a:t>
-            </a:r>
-          </a:p>
-        </p:txBody>
-      </p:sp>
-      <p:sp>
-        <p:nvSpPr>
-          <p:cNvPr id="4" name="Slide Number Placeholder 3"/>
-          <p:cNvSpPr>
-            <a:spLocks noGrp="1"/>
-          </p:cNvSpPr>
-          <p:nvPr>
-            <p:ph type="sldNum" idx="5" sz="quarter"/>
-          </p:nvPr>
-        </p:nvSpPr>
-        <p:spPr/>
-      </p:sp>
-    </p:spTree>
-  </p:cSld>
-  <p:clrMapOvr>
-    <a:masterClrMapping/>
-  </p:clrMapOvr>
-</p:notes>
-</file>
-
-<file path=ppt/notesSlides/notesSlide2.xml><?xml version="1.0" encoding="utf-8"?>
-<p:notes xmlns:a="http://schemas.openxmlformats.org/drawingml/2006/main" xmlns:p="http://schemas.openxmlformats.org/presentationml/2006/main" xmlns:r="http://schemas.openxmlformats.org/officeDocument/2006/relationships">
-  <p:cSld>
-    <p:spTree>
-      <p:nvGrpSpPr>
-        <p:cNvPr id="1" name=""/>
-        <p:cNvGrpSpPr/>
-        <p:nvPr/>
-      </p:nvGrpSpPr>
-      <p:grpSpPr>
-        <a:xfrm>
-          <a:off x="0" y="0"/>
-          <a:ext cx="0" cy="0"/>
-          <a:chOff x="0" y="0"/>
-          <a:chExt cx="0" cy="0"/>
-        </a:xfrm>
-      </p:grpSpPr>
-      <p:sp>
-        <p:nvSpPr>
-          <p:cNvPr id="2" name="Slide Image Placeholder 1"/>
-          <p:cNvSpPr>
-            <a:spLocks noGrp="1"/>
-          </p:cNvSpPr>
-          <p:nvPr>
-            <p:ph type="sldImg" idx="2"/>
-          </p:nvPr>
-        </p:nvSpPr>
-        <p:spPr/>
-      </p:sp>
-      <p:sp>
-        <p:nvSpPr>
-          <p:cNvPr id="3" name="Notes Placeholder 2"/>
-          <p:cNvSpPr>
-            <a:spLocks noGrp="1"/>
-          </p:cNvSpPr>
-          <p:nvPr>
-            <p:ph type="body" idx="3" sz="quarter"/>
-          </p:nvPr>
-        </p:nvSpPr>
-        <p:spPr/>
-        <p:txBody>
-          <a:bodyPr/>
-          <a:lstStyle/>
-          <a:p>
-            <a:r>
-              <a:rPr sz="1100" b="0" lang="zh-CN">
-                <a:solidFill>
-                  <a:srgbClr val="1B242F"/>
-                </a:solidFill>
-                <a:latin typeface="Microsoft YaHei"/>
-                <a:ea typeface="Microsoft YaHei"/>
-                <a:cs typeface="Microsoft YaHei"/>
-              </a:rPr>
-              <a:t>证据与实现边界：</a:t>
-            </a:r>
-          </a:p>
-          <a:p>
-            <a:r>
-              <a:rPr sz="1100" b="0" lang="zh-CN">
-                <a:solidFill>
-                  <a:srgbClr val="1B242F"/>
-                </a:solidFill>
-                <a:latin typeface="Microsoft YaHei"/>
-                <a:ea typeface="Microsoft YaHei"/>
-                <a:cs typeface="Microsoft YaHei"/>
-              </a:rPr>
-              <a:t>1. 线上聚合日志存在 status_code=200 的 capacity 事件，体现 HTTP 成功与 Responses 终态成功不同。</a:t>
-            </a:r>
-          </a:p>
-          <a:p>
-            <a:r>
-              <a:rPr sz="1100" b="0" lang="zh-CN">
-                <a:solidFill>
-                  <a:srgbClr val="1B242F"/>
-                </a:solidFill>
-                <a:latin typeface="Microsoft YaHei"/>
-                <a:ea typeface="Microsoft YaHei"/>
-                <a:cs typeface="Microsoft YaHei"/>
-              </a:rPr>
-              <a:t>2. 表中同时列出线上日志、源码识别分支与测试覆盖的错误签名，不主张全部在同一次事故里出现。</a:t>
-            </a:r>
-          </a:p>
-          <a:p>
-            <a:r>
-              <a:rPr sz="1100" b="0" lang="zh-CN">
-                <a:solidFill>
-                  <a:srgbClr val="1B242F"/>
-                </a:solidFill>
-                <a:latin typeface="Microsoft YaHei"/>
-                <a:ea typeface="Microsoft YaHei"/>
-                <a:cs typeface="Microsoft YaHei"/>
-              </a:rPr>
-              <a:t>3. f757a78 (2026-09-07) 的默认 buffered Responses：完整缓存到合法 response.completed 且正常收尾，之后才交付；在交付前，即使上游已有文本/工具增量，仍可以丢弃失败前缀并按预算重放。只有显式开启实时流时，才受到首个有效进度的重试边界限制。</a:t>
-            </a:r>
-          </a:p>
-          <a:p>
-            <a:r>
-              <a:rPr sz="1100" b="0" lang="zh-CN">
-                <a:solidFill>
-                  <a:srgbClr val="1B242F"/>
-                </a:solidFill>
-                <a:latin typeface="Microsoft YaHei"/>
-                <a:ea typeface="Microsoft YaHei"/>
-                <a:cs typeface="Microsoft YaHei"/>
-              </a:rPr>
-              <a:t>4. 终态不可恢复错误保留 code：context_length_exceeded、invalid_request_error、content_policy_violation 等。</a:t>
-            </a:r>
-          </a:p>
-          <a:p>
-            <a:r>
-              <a:rPr sz="1100" b="0" lang="zh-CN">
-                <a:solidFill>
-                  <a:srgbClr val="1B242F"/>
-                </a:solidFill>
-                <a:latin typeface="Microsoft YaHei"/>
-                <a:ea typeface="Microsoft YaHei"/>
-                <a:cs typeface="Microsoft YaHei"/>
-              </a:rPr>
-              <a:t>5. 自动恢复仅恢复 root session，subagent 不能完整续接。</a:t>
-            </a:r>
-          </a:p>
-          <a:p>
-            <a:r>
-              <a:rPr sz="1100" b="0" lang="zh-CN">
-                <a:solidFill>
-                  <a:srgbClr val="1B242F"/>
-                </a:solidFill>
-                <a:latin typeface="Microsoft YaHei"/>
-                <a:ea typeface="Microsoft YaHei"/>
-                <a:cs typeface="Microsoft YaHei"/>
-              </a:rPr>
-              <a:t>6. 本页对已实现功能的结论基于本地仓库 HEAD，未逐实例核对线上镜像版本。</a:t>
-            </a:r>
-          </a:p>
-        </p:txBody>
-      </p:sp>
-      <p:sp>
-        <p:nvSpPr>
-          <p:cNvPr id="4" name="Slide Number Placeholder 3"/>
-          <p:cNvSpPr>
-            <a:spLocks noGrp="1"/>
-          </p:cNvSpPr>
-          <p:nvPr>
-            <p:ph type="sldNum" idx="5" sz="quarter"/>
-          </p:nvPr>
-        </p:nvSpPr>
-        <p:spPr/>
-      </p:sp>
-    </p:spTree>
-  </p:cSld>
-  <p:clrMapOvr>
-    <a:masterClrMapping/>
-  </p:clrMapOvr>
-</p:notes>
-</file>
-
-<file path=ppt/notesSlides/notesSlide3.xml><?xml version="1.0" encoding="utf-8"?>
-<p:notes xmlns:a="http://schemas.openxmlformats.org/drawingml/2006/main" xmlns:p="http://schemas.openxmlformats.org/presentationml/2006/main" xmlns:r="http://schemas.openxmlformats.org/officeDocument/2006/relationships">
-  <p:cSld>
-    <p:spTree>
-      <p:nvGrpSpPr>
-        <p:cNvPr id="1" name=""/>
-        <p:cNvGrpSpPr/>
-        <p:nvPr/>
-      </p:nvGrpSpPr>
-      <p:grpSpPr>
-        <a:xfrm>
-          <a:off x="0" y="0"/>
-          <a:ext cx="0" cy="0"/>
-          <a:chOff x="0" y="0"/>
-          <a:chExt cx="0" cy="0"/>
-        </a:xfrm>
-      </p:grpSpPr>
-      <p:sp>
-        <p:nvSpPr>
-          <p:cNvPr id="2" name="Slide Image Placeholder 1"/>
-          <p:cNvSpPr>
-            <a:spLocks noGrp="1"/>
-          </p:cNvSpPr>
-          <p:nvPr>
-            <p:ph type="sldImg" idx="2"/>
-          </p:nvPr>
-        </p:nvSpPr>
-        <p:spPr/>
-      </p:sp>
-      <p:sp>
-        <p:nvSpPr>
-          <p:cNvPr id="3" name="Notes Placeholder 2"/>
-          <p:cNvSpPr>
-            <a:spLocks noGrp="1"/>
-          </p:cNvSpPr>
-          <p:nvPr>
-            <p:ph type="body" idx="3" sz="quarter"/>
-          </p:nvPr>
-        </p:nvSpPr>
-        <p:spPr/>
-        <p:txBody>
-          <a:bodyPr/>
-          <a:lstStyle/>
-          <a:p>
-            <a:r>
-              <a:rPr sz="1100" b="0" lang="zh-CN">
-                <a:solidFill>
-                  <a:srgbClr val="1B242F"/>
-                </a:solidFill>
-                <a:latin typeface="Microsoft YaHei"/>
-                <a:ea typeface="Microsoft YaHei"/>
-                <a:cs typeface="Microsoft YaHei"/>
-              </a:rPr>
-              <a:t>原生 Job 证据：</a:t>
-            </a:r>
-          </a:p>
-          <a:p>
-            <a:r>
-              <a:rPr sz="1100" b="0" lang="zh-CN">
-                <a:solidFill>
-                  <a:srgbClr val="1B242F"/>
-                </a:solidFill>
-                <a:latin typeface="Microsoft YaHei"/>
-                <a:ea typeface="Microsoft YaHei"/>
-                <a:cs typeface="Microsoft YaHei"/>
-              </a:rPr>
-              <a:t>/workspace/volume/sto-gen2/agentFS/jobs_info/job-bangc-langtime-gpt-6-astra-ultra-1-torc-tion-fa-sparse-bf16-s011-20260908-195756-NNn2-cancel/cnagent-skill/.runtime/home/current/.codex/markdown/index.md</a:t>
-            </a:r>
-          </a:p>
-          <a:p>
-            <a:r>
-              <a:rPr sz="1100" b="0" lang="zh-CN">
-                <a:solidFill>
-                  <a:srgbClr val="1B242F"/>
-                </a:solidFill>
-                <a:latin typeface="Microsoft YaHei"/>
-                <a:ea typeface="Microsoft YaHei"/>
-                <a:cs typeface="Microsoft YaHei"/>
-              </a:rPr>
-              <a:t>L59: 明确的目录边界规则。</a:t>
-            </a:r>
-          </a:p>
-          <a:p>
-            <a:r>
-              <a:rPr sz="1100" b="0" lang="zh-CN">
-                <a:solidFill>
-                  <a:srgbClr val="1B242F"/>
-                </a:solidFill>
-                <a:latin typeface="Microsoft YaHei"/>
-                <a:ea typeface="Microsoft YaHei"/>
-                <a:cs typeface="Microsoft YaHei"/>
-              </a:rPr>
-              <a:t>L253/L284：find命令；完整输出在原生sessions/2026/09/08/rollout-2026-09-08T20-01-35-01a080e5-2107-75b2-8791-c8f147c1abb6.jsonl:308，包括wwwQ、DnWG、lINg、O8gP的ops目录。</a:t>
-            </a:r>
-          </a:p>
-          <a:p>
-            <a:r>
-              <a:rPr sz="1100" b="0" lang="zh-CN">
-                <a:solidFill>
-                  <a:srgbClr val="1B242F"/>
-                </a:solidFill>
-                <a:latin typeface="Microsoft YaHei"/>
-                <a:ea typeface="Microsoft YaHei"/>
-                <a:cs typeface="Microsoft YaHei"/>
-              </a:rPr>
-              <a:t>L6027 附近：apply_patch 目标 Job 后缀错误，从 20260908-195756-NNn2 拼成 20260908-NNn2，报 No such file or directory。</a:t>
-            </a:r>
-          </a:p>
-          <a:p>
-            <a:r>
-              <a:rPr sz="1100" b="0" lang="zh-CN">
-                <a:solidFill>
-                  <a:srgbClr val="1B242F"/>
-                </a:solidFill>
-                <a:latin typeface="Microsoft YaHei"/>
-                <a:ea typeface="Microsoft YaHei"/>
-                <a:cs typeface="Microsoft YaHei"/>
-              </a:rPr>
-              <a:t>当前能力边界：workspace/HOME 分开，Codex 使用 --yolo；没有证据证明已实施每 Job 的文件系统强隔离。</a:t>
-            </a:r>
-          </a:p>
-          <a:p>
-            <a:r>
-              <a:rPr sz="1100" b="0" lang="zh-CN">
-                <a:solidFill>
-                  <a:srgbClr val="1B242F"/>
-                </a:solidFill>
-                <a:latin typeface="Microsoft YaHei"/>
-                <a:ea typeface="Microsoft YaHei"/>
-                <a:cs typeface="Microsoft YaHei"/>
-              </a:rPr>
-              <a:t>目录白名单、真实路径校验和最小挂载属于待落地方案；其效果是验收目标，不是线上既成事实。</a:t>
-            </a:r>
-          </a:p>
-        </p:txBody>
-      </p:sp>
-      <p:sp>
-        <p:nvSpPr>
-          <p:cNvPr id="4" name="Slide Number Placeholder 3"/>
-          <p:cNvSpPr>
-            <a:spLocks noGrp="1"/>
-          </p:cNvSpPr>
-          <p:nvPr>
-            <p:ph type="sldNum" idx="5" sz="quarter"/>
-          </p:nvPr>
-        </p:nvSpPr>
-        <p:spPr/>
-      </p:sp>
-    </p:spTree>
-  </p:cSld>
-  <p:clrMapOvr>
-    <a:masterClrMapping/>
-  </p:clrMapOvr>
-</p:notes>
 </file>
 
 <file path=ppt/slideLayouts/slideLayout1.xml><?xml version="1.0" encoding="utf-8"?>
@@ -3911,8 +3106,8 @@
         </p:nvSpPr>
         <p:spPr>
           <a:xfrm>
-            <a:off x="566928" y="318211"/>
-            <a:ext cx="521207" cy="448056"/>
+            <a:off x="640080" y="365760"/>
+            <a:ext cx="594360" cy="548640"/>
           </a:xfrm>
           <a:prstGeom prst="rect">
             <a:avLst/>
@@ -3937,7 +3132,7 @@
               </a:spcAft>
             </a:pPr>
             <a:r>
-              <a:rPr sz="2600" b="1" lang="zh-CN">
+              <a:rPr sz="2800" b="1" lang="zh-CN">
                 <a:solidFill>
                   <a:srgbClr val="205780"/>
                 </a:solidFill>
@@ -3958,8 +3153,8 @@
         </p:nvSpPr>
         <p:spPr>
           <a:xfrm>
-            <a:off x="1307592" y="301752"/>
-            <a:ext cx="10323576" cy="484632"/>
+            <a:off x="1389888" y="356616"/>
+            <a:ext cx="10158984" cy="576072"/>
           </a:xfrm>
           <a:prstGeom prst="rect">
             <a:avLst/>
@@ -3984,29 +3179,50 @@
               </a:spcAft>
             </a:pPr>
             <a:r>
-              <a:rPr sz="2700" b="1" lang="zh-CN">
-                <a:solidFill>
-                  <a:srgbClr val="16324C"/>
-                </a:solidFill>
-                <a:latin typeface="Microsoft YaHei"/>
-                <a:ea typeface="Microsoft YaHei"/>
-                <a:cs typeface="Microsoft YaHei"/>
-              </a:rPr>
-              <a:t>小文件先耗尽 inode：盘还没满，Job 已无法落盘</a:t>
-            </a:r>
-          </a:p>
-        </p:txBody>
-      </p:sp>
-      <p:sp>
-        <p:nvSpPr>
-          <p:cNvPr id="4" name="TextBox 3"/>
+              <a:rPr sz="2800" b="1" lang="zh-CN">
+                <a:solidFill>
+                  <a:srgbClr val="1B242F"/>
+                </a:solidFill>
+                <a:latin typeface="Microsoft YaHei"/>
+                <a:ea typeface="Microsoft YaHei"/>
+                <a:cs typeface="Microsoft YaHei"/>
+              </a:rPr>
+              <a:t>小文件过多：空间没满，却写不进文件</a:t>
+            </a:r>
+          </a:p>
+        </p:txBody>
+      </p:sp>
+      <p:cxnSp>
+        <p:nvCxnSpPr>
+          <p:cNvPr id="4" name="Connector 3"/>
+          <p:cNvCxnSpPr/>
+          <p:nvPr/>
+        </p:nvCxnSpPr>
+        <p:spPr>
+          <a:xfrm>
+            <a:off x="640080" y="1024128"/>
+            <a:ext cx="10908792" cy="0"/>
+          </a:xfrm>
+          <a:prstGeom prst="line">
+            <a:avLst/>
+          </a:prstGeom>
+          <a:ln w="13970">
+            <a:solidFill>
+              <a:srgbClr val="205780"/>
+            </a:solidFill>
+          </a:ln>
+        </p:spPr>
+      </p:cxnSp>
+      <p:sp>
+        <p:nvSpPr>
+          <p:cNvPr id="5" name="TextBox 4"/>
           <p:cNvSpPr txBox="1"/>
           <p:nvPr/>
         </p:nvSpPr>
         <p:spPr>
           <a:xfrm>
-            <a:off x="566928" y="923544"/>
-            <a:ext cx="11064240" cy="292608"/>
+            <a:off x="640080" y="1216152"/>
+            <a:ext cx="10908792" cy="393192"/>
           </a:xfrm>
           <a:prstGeom prst="rect">
             <a:avLst/>
@@ -4031,50 +3247,50 @@
               </a:spcAft>
             </a:pPr>
             <a:r>
-              <a:rPr sz="1610" b="0" lang="zh-CN">
-                <a:solidFill>
-                  <a:srgbClr val="646E79"/>
-                </a:solidFill>
-                <a:latin typeface="Microsoft YaHei"/>
-                <a:ea typeface="Microsoft YaHei"/>
-                <a:cs typeface="Microsoft YaHei"/>
-              </a:rPr>
-              <a:t>几千个同质化 Job 的依赖、缓存与中间产物，消耗的不只是 TB 容量，还有文件数额度。</a:t>
+              <a:rPr sz="2100" b="1" lang="zh-CN">
+                <a:solidFill>
+                  <a:srgbClr val="205780"/>
+                </a:solidFill>
+                <a:latin typeface="Microsoft YaHei"/>
+                <a:ea typeface="Microsoft YaHei"/>
+                <a:cs typeface="Microsoft YaHei"/>
+              </a:rPr>
+              <a:t>问题：</a:t>
             </a:r>
           </a:p>
         </p:txBody>
       </p:sp>
       <p:cxnSp>
         <p:nvCxnSpPr>
-          <p:cNvPr id="5" name="Connector 4"/>
+          <p:cNvPr id="6" name="Connector 5"/>
           <p:cNvCxnSpPr/>
           <p:nvPr/>
         </p:nvCxnSpPr>
         <p:spPr>
           <a:xfrm>
-            <a:off x="566928" y="1307592"/>
-            <a:ext cx="11064240" cy="0"/>
+            <a:off x="640080" y="3995928"/>
+            <a:ext cx="10908792" cy="0"/>
           </a:xfrm>
           <a:prstGeom prst="line">
             <a:avLst/>
           </a:prstGeom>
-          <a:ln w="15875">
+          <a:ln w="10160">
             <a:solidFill>
-              <a:srgbClr val="16324C"/>
+              <a:srgbClr val="CBD4DB"/>
             </a:solidFill>
           </a:ln>
         </p:spPr>
       </p:cxnSp>
       <p:sp>
         <p:nvSpPr>
-          <p:cNvPr id="6" name="TextBox 5"/>
+          <p:cNvPr id="7" name="TextBox 6"/>
           <p:cNvSpPr txBox="1"/>
           <p:nvPr/>
         </p:nvSpPr>
         <p:spPr>
           <a:xfrm>
-            <a:off x="566928" y="1463040"/>
-            <a:ext cx="4023360" cy="310896"/>
+            <a:off x="640080" y="4187952"/>
+            <a:ext cx="10908792" cy="393192"/>
           </a:xfrm>
           <a:prstGeom prst="rect">
             <a:avLst/>
@@ -4099,29 +3315,29 @@
               </a:spcAft>
             </a:pPr>
             <a:r>
-              <a:rPr sz="1800" b="1" lang="zh-CN">
-                <a:solidFill>
-                  <a:srgbClr val="205780"/>
-                </a:solidFill>
-                <a:latin typeface="Microsoft YaHei"/>
-                <a:ea typeface="Microsoft YaHei"/>
-                <a:cs typeface="Microsoft YaHei"/>
-              </a:rPr>
-              <a:t>问题与发现</a:t>
-            </a:r>
-          </a:p>
-        </p:txBody>
-      </p:sp>
-      <p:sp>
-        <p:nvSpPr>
-          <p:cNvPr id="7" name="TextBox 6"/>
+              <a:rPr sz="2100" b="1" lang="zh-CN">
+                <a:solidFill>
+                  <a:srgbClr val="1F715D"/>
+                </a:solidFill>
+                <a:latin typeface="Microsoft YaHei"/>
+                <a:ea typeface="Microsoft YaHei"/>
+                <a:cs typeface="Microsoft YaHei"/>
+              </a:rPr>
+              <a:t>解决办法：</a:t>
+            </a:r>
+          </a:p>
+        </p:txBody>
+      </p:sp>
+      <p:sp>
+        <p:nvSpPr>
+          <p:cNvPr id="8" name="TextBox 7"/>
           <p:cNvSpPr txBox="1"/>
           <p:nvPr/>
         </p:nvSpPr>
         <p:spPr>
           <a:xfrm>
-            <a:off x="4572000" y="1504188"/>
-            <a:ext cx="7059168" cy="228600"/>
+            <a:off x="676656" y="1746504"/>
+            <a:ext cx="210312" cy="320040"/>
           </a:xfrm>
           <a:prstGeom prst="rect">
             <a:avLst/>
@@ -4134,7 +3350,7 @@
           </a:bodyPr>
           <a:lstStyle/>
           <a:p>
-            <a:pPr algn="r">
+            <a:pPr algn="l">
               <a:lnSpc>
                 <a:spcPct val="112000"/>
               </a:lnSpc>
@@ -4146,40 +3362,19 @@
               </a:spcAft>
             </a:pPr>
             <a:r>
-              <a:rPr sz="1120" b="0" lang="zh-CN">
-                <a:solidFill>
-                  <a:srgbClr val="646E79"/>
-                </a:solidFill>
-                <a:latin typeface="Microsoft YaHei"/>
-                <a:ea typeface="Microsoft YaHei"/>
-                <a:cs typeface="Microsoft YaHei"/>
-              </a:rPr>
-              <a:t>修复历史 + 真实 Job 收尾记录</a:t>
-            </a:r>
-          </a:p>
-        </p:txBody>
-      </p:sp>
-      <p:cxnSp>
-        <p:nvCxnSpPr>
-          <p:cNvPr id="8" name="Connector 7"/>
-          <p:cNvCxnSpPr/>
-          <p:nvPr/>
-        </p:nvCxnSpPr>
-        <p:spPr>
-          <a:xfrm>
-            <a:off x="566928" y="4023360"/>
-            <a:ext cx="11064240" cy="0"/>
-          </a:xfrm>
-          <a:prstGeom prst="line">
-            <a:avLst/>
-          </a:prstGeom>
-          <a:ln w="11430">
-            <a:solidFill>
-              <a:srgbClr val="CBD4DB"/>
-            </a:solidFill>
-          </a:ln>
-        </p:spPr>
-      </p:cxnSp>
+              <a:rPr sz="2100" b="0" lang="zh-CN">
+                <a:solidFill>
+                  <a:srgbClr val="1B242F"/>
+                </a:solidFill>
+                <a:latin typeface="Microsoft YaHei"/>
+                <a:ea typeface="Microsoft YaHei"/>
+                <a:cs typeface="Microsoft YaHei"/>
+              </a:rPr>
+              <a:t>•</a:t>
+            </a:r>
+          </a:p>
+        </p:txBody>
+      </p:sp>
       <p:sp>
         <p:nvSpPr>
           <p:cNvPr id="9" name="TextBox 8"/>
@@ -4188,8 +3383,8 @@
         </p:nvSpPr>
         <p:spPr>
           <a:xfrm>
-            <a:off x="566928" y="4187952"/>
-            <a:ext cx="4023360" cy="310896"/>
+            <a:off x="960119" y="1746504"/>
+            <a:ext cx="10588752" cy="658368"/>
           </a:xfrm>
           <a:prstGeom prst="rect">
             <a:avLst/>
@@ -4204,25 +3399,49 @@
           <a:p>
             <a:pPr algn="l">
               <a:lnSpc>
-                <a:spcPct val="112000"/>
-              </a:lnSpc>
-              <a:spcBef>
-                <a:spcPts val="0"/>
-              </a:spcBef>
-              <a:spcAft>
-                <a:spcPts val="0"/>
-              </a:spcAft>
-            </a:pPr>
-            <a:r>
-              <a:rPr sz="1800" b="1" lang="zh-CN">
-                <a:solidFill>
-                  <a:srgbClr val="1F715D"/>
-                </a:solidFill>
-                <a:latin typeface="Microsoft YaHei"/>
-                <a:ea typeface="Microsoft YaHei"/>
-                <a:cs typeface="Microsoft YaHei"/>
-              </a:rPr>
-              <a:t>解决方案与变化</a:t>
+                <a:spcPct val="115000"/>
+              </a:lnSpc>
+              <a:spcBef>
+                <a:spcPts val="0"/>
+              </a:spcBef>
+              <a:spcAft>
+                <a:spcPts val="0"/>
+              </a:spcAft>
+            </a:pPr>
+            <a:r>
+              <a:rPr sz="2100" b="0" lang="zh-CN">
+                <a:solidFill>
+                  <a:srgbClr val="1B242F"/>
+                </a:solidFill>
+                <a:latin typeface="Microsoft YaHei"/>
+                <a:ea typeface="Microsoft YaHei"/>
+                <a:cs typeface="Microsoft YaHei"/>
+              </a:rPr>
+              <a:t>例如：一个 10 TB 的挂载卷供上千个 Agent 使用，</a:t>
+            </a:r>
+          </a:p>
+          <a:p>
+            <a:pPr algn="l">
+              <a:lnSpc>
+                <a:spcPct val="115000"/>
+              </a:lnSpc>
+              <a:spcBef>
+                <a:spcPts val="0"/>
+              </a:spcBef>
+              <a:spcAft>
+                <a:spcPts val="0"/>
+              </a:spcAft>
+            </a:pPr>
+            <a:r>
+              <a:rPr sz="2100" b="0" lang="zh-CN">
+                <a:solidFill>
+                  <a:srgbClr val="1B242F"/>
+                </a:solidFill>
+                <a:latin typeface="Microsoft YaHei"/>
+                <a:ea typeface="Microsoft YaHei"/>
+                <a:cs typeface="Microsoft YaHei"/>
+              </a:rPr>
+              <a:t>每个任务都重复克隆代码、安装依赖，产生大量缓存和中间小文件。</a:t>
             </a:r>
           </a:p>
         </p:txBody>
@@ -4235,8 +3454,8 @@
         </p:nvSpPr>
         <p:spPr>
           <a:xfrm>
-            <a:off x="4572000" y="4229100"/>
-            <a:ext cx="7059168" cy="228600"/>
+            <a:off x="676656" y="2761488"/>
+            <a:ext cx="210312" cy="320040"/>
           </a:xfrm>
           <a:prstGeom prst="rect">
             <a:avLst/>
@@ -4249,7 +3468,7 @@
           </a:bodyPr>
           <a:lstStyle/>
           <a:p>
-            <a:pPr algn="r">
+            <a:pPr algn="l">
               <a:lnSpc>
                 <a:spcPct val="112000"/>
               </a:lnSpc>
@@ -4261,15 +3480,15 @@
               </a:spcAft>
             </a:pPr>
             <a:r>
-              <a:rPr sz="1120" b="0" lang="zh-CN">
-                <a:solidFill>
-                  <a:srgbClr val="646E79"/>
-                </a:solidFill>
-                <a:latin typeface="Microsoft YaHei"/>
-                <a:ea typeface="Microsoft YaHei"/>
-                <a:cs typeface="Microsoft YaHei"/>
-              </a:rPr>
-              <a:t>已有自动清理；当前占用是清理启用后的状态</a:t>
+              <a:rPr sz="2100" b="0" lang="zh-CN">
+                <a:solidFill>
+                  <a:srgbClr val="1B242F"/>
+                </a:solidFill>
+                <a:latin typeface="Microsoft YaHei"/>
+                <a:ea typeface="Microsoft YaHei"/>
+                <a:cs typeface="Microsoft YaHei"/>
+              </a:rPr>
+              <a:t>•</a:t>
             </a:r>
           </a:p>
         </p:txBody>
@@ -4282,8 +3501,8 @@
         </p:nvSpPr>
         <p:spPr>
           <a:xfrm>
-            <a:off x="566928" y="1856231"/>
-            <a:ext cx="1197864" cy="594360"/>
+            <a:off x="960119" y="2761488"/>
+            <a:ext cx="10588752" cy="658368"/>
           </a:xfrm>
           <a:prstGeom prst="rect">
             <a:avLst/>
@@ -4298,25 +3517,49 @@
           <a:p>
             <a:pPr algn="l">
               <a:lnSpc>
-                <a:spcPct val="112000"/>
-              </a:lnSpc>
-              <a:spcBef>
-                <a:spcPts val="0"/>
-              </a:spcBef>
-              <a:spcAft>
-                <a:spcPts val="0"/>
-              </a:spcAft>
-            </a:pPr>
-            <a:r>
-              <a:rPr sz="1680" b="1" lang="zh-CN">
-                <a:solidFill>
-                  <a:srgbClr val="205780"/>
-                </a:solidFill>
-                <a:latin typeface="Microsoft YaHei"/>
-                <a:ea typeface="Microsoft YaHei"/>
-                <a:cs typeface="Microsoft YaHei"/>
-              </a:rPr>
-              <a:t>问题</a:t>
+                <a:spcPct val="115000"/>
+              </a:lnSpc>
+              <a:spcBef>
+                <a:spcPts val="0"/>
+              </a:spcBef>
+              <a:spcAft>
+                <a:spcPts val="0"/>
+              </a:spcAft>
+            </a:pPr>
+            <a:r>
+              <a:rPr sz="2100" b="0" lang="zh-CN">
+                <a:solidFill>
+                  <a:srgbClr val="1B242F"/>
+                </a:solidFill>
+                <a:latin typeface="Microsoft YaHei"/>
+                <a:ea typeface="Microsoft YaHei"/>
+                <a:cs typeface="Microsoft YaHei"/>
+              </a:rPr>
+              <a:t>即使磁盘还有空间，inode（文件和目录的记录额度）也可能先耗尽，</a:t>
+            </a:r>
+          </a:p>
+          <a:p>
+            <a:pPr algn="l">
+              <a:lnSpc>
+                <a:spcPct val="115000"/>
+              </a:lnSpc>
+              <a:spcBef>
+                <a:spcPts val="0"/>
+              </a:spcBef>
+              <a:spcAft>
+                <a:spcPts val="0"/>
+              </a:spcAft>
+            </a:pPr>
+            <a:r>
+              <a:rPr sz="2100" b="0" lang="zh-CN">
+                <a:solidFill>
+                  <a:srgbClr val="1B242F"/>
+                </a:solidFill>
+                <a:latin typeface="Microsoft YaHei"/>
+                <a:ea typeface="Microsoft YaHei"/>
+                <a:cs typeface="Microsoft YaHei"/>
+              </a:rPr>
+              <a:t>导致无法新建文件。文件数量与字节容量，是两个不同的限制。</a:t>
             </a:r>
           </a:p>
         </p:txBody>
@@ -4329,8 +3572,8 @@
         </p:nvSpPr>
         <p:spPr>
           <a:xfrm>
-            <a:off x="1892807" y="1856231"/>
-            <a:ext cx="9738360" cy="594360"/>
+            <a:off x="676656" y="4663440"/>
+            <a:ext cx="210312" cy="320040"/>
           </a:xfrm>
           <a:prstGeom prst="rect">
             <a:avLst/>
@@ -4355,7 +3598,7 @@
               </a:spcAft>
             </a:pPr>
             <a:r>
-              <a:rPr sz="1680" b="0" lang="zh-CN">
+              <a:rPr sz="2000" b="0" lang="zh-CN">
                 <a:solidFill>
                   <a:srgbClr val="1B242F"/>
                 </a:solidFill>
@@ -4363,31 +3606,7 @@
                 <a:ea typeface="Microsoft YaHei"/>
                 <a:cs typeface="Microsoft YaHei"/>
               </a:rPr>
-              <a:t>每个文件、目录都要占 inode。大量 Job 重复保留运行环境、Git/子模块、编译缓存、</a:t>
-            </a:r>
-          </a:p>
-          <a:p>
-            <a:pPr algn="l">
-              <a:lnSpc>
-                <a:spcPct val="112000"/>
-              </a:lnSpc>
-              <a:spcBef>
-                <a:spcPts val="0"/>
-              </a:spcBef>
-              <a:spcAft>
-                <a:spcPts val="0"/>
-              </a:spcAft>
-            </a:pPr>
-            <a:r>
-              <a:rPr sz="1680" b="0" lang="zh-CN">
-                <a:solidFill>
-                  <a:srgbClr val="1B242F"/>
-                </a:solidFill>
-                <a:latin typeface="Microsoft YaHei"/>
-                <a:ea typeface="Microsoft YaHei"/>
-                <a:cs typeface="Microsoft YaHei"/>
-              </a:rPr>
-              <a:t>调试文件和原始轨迹，文件数可能先碰到上限；扩容 SSD 并不自动消除小文件压力。</a:t>
+              <a:t>•</a:t>
             </a:r>
           </a:p>
         </p:txBody>
@@ -4400,8 +3619,8 @@
         </p:nvSpPr>
         <p:spPr>
           <a:xfrm>
-            <a:off x="566928" y="2624328"/>
-            <a:ext cx="1197864" cy="566928"/>
+            <a:off x="960119" y="4663440"/>
+            <a:ext cx="10588752" cy="658368"/>
           </a:xfrm>
           <a:prstGeom prst="rect">
             <a:avLst/>
@@ -4416,25 +3635,49 @@
           <a:p>
             <a:pPr algn="l">
               <a:lnSpc>
-                <a:spcPct val="112000"/>
-              </a:lnSpc>
-              <a:spcBef>
-                <a:spcPts val="0"/>
-              </a:spcBef>
-              <a:spcAft>
-                <a:spcPts val="0"/>
-              </a:spcAft>
-            </a:pPr>
-            <a:r>
-              <a:rPr sz="1680" b="1" lang="zh-CN">
-                <a:solidFill>
-                  <a:srgbClr val="205780"/>
-                </a:solidFill>
-                <a:latin typeface="Microsoft YaHei"/>
-                <a:ea typeface="Microsoft YaHei"/>
-                <a:cs typeface="Microsoft YaHei"/>
-              </a:rPr>
-              <a:t>怎么发现</a:t>
+                <a:spcPct val="115000"/>
+              </a:lnSpc>
+              <a:spcBef>
+                <a:spcPts val="0"/>
+              </a:spcBef>
+              <a:spcAft>
+                <a:spcPts val="0"/>
+              </a:spcAft>
+            </a:pPr>
+            <a:r>
+              <a:rPr sz="2000" b="0" lang="zh-CN">
+                <a:solidFill>
+                  <a:srgbClr val="1B242F"/>
+                </a:solidFill>
+                <a:latin typeface="Microsoft YaHei"/>
+                <a:ea typeface="Microsoft YaHei"/>
+                <a:cs typeface="Microsoft YaHei"/>
+              </a:rPr>
+              <a:t>任务结束即清理：删除无需保留的虚拟环境、依赖副本、Git 元数据、</a:t>
+            </a:r>
+          </a:p>
+          <a:p>
+            <a:pPr algn="l">
+              <a:lnSpc>
+                <a:spcPct val="115000"/>
+              </a:lnSpc>
+              <a:spcBef>
+                <a:spcPts val="0"/>
+              </a:spcBef>
+              <a:spcAft>
+                <a:spcPts val="0"/>
+              </a:spcAft>
+            </a:pPr>
+            <a:r>
+              <a:rPr sz="2000" b="0" lang="zh-CN">
+                <a:solidFill>
+                  <a:srgbClr val="1B242F"/>
+                </a:solidFill>
+                <a:latin typeface="Microsoft YaHei"/>
+                <a:ea typeface="Microsoft YaHei"/>
+                <a:cs typeface="Microsoft YaHei"/>
+              </a:rPr>
+              <a:t>编译/测试缓存、临时数据和崩溃转储。</a:t>
             </a:r>
           </a:p>
         </p:txBody>
@@ -4447,8 +3690,8 @@
         </p:nvSpPr>
         <p:spPr>
           <a:xfrm>
-            <a:off x="1892807" y="2624328"/>
-            <a:ext cx="9738360" cy="566928"/>
+            <a:off x="676656" y="5340096"/>
+            <a:ext cx="210312" cy="320040"/>
           </a:xfrm>
           <a:prstGeom prst="rect">
             <a:avLst/>
@@ -4473,7 +3716,7 @@
               </a:spcAft>
             </a:pPr>
             <a:r>
-              <a:rPr sz="1680" b="0" lang="zh-CN">
+              <a:rPr sz="2000" b="0" lang="zh-CN">
                 <a:solidFill>
                   <a:srgbClr val="1B242F"/>
                 </a:solidFill>
@@ -4481,31 +3724,7 @@
                 <a:ea typeface="Microsoft YaHei"/>
                 <a:cs typeface="Microsoft YaHei"/>
               </a:rPr>
-              <a:t>回溯修复：05-25 新增“小文件清理”（5cc0a1f）；08-26 补上 cnagent-test 清理，</a:t>
-            </a:r>
-          </a:p>
-          <a:p>
-            <a:pPr algn="l">
-              <a:lnSpc>
-                <a:spcPct val="112000"/>
-              </a:lnSpc>
-              <a:spcBef>
-                <a:spcPts val="0"/>
-              </a:spcBef>
-              <a:spcAft>
-                <a:spcPts val="0"/>
-              </a:spcAft>
-            </a:pPr>
-            <a:r>
-              <a:rPr sz="1680" b="0" lang="zh-CN">
-                <a:solidFill>
-                  <a:srgbClr val="1B242F"/>
-                </a:solidFill>
-                <a:latin typeface="Microsoft YaHei"/>
-                <a:ea typeface="Microsoft YaHei"/>
-                <a:cs typeface="Microsoft YaHei"/>
-              </a:rPr>
-              <a:t>又修复归档改名后路径失效造成的漏清。问题指向重复小文件累积，而不只是磁盘字节不足。</a:t>
+              <a:t>•</a:t>
             </a:r>
           </a:p>
         </p:txBody>
@@ -4518,8 +3737,8 @@
         </p:nvSpPr>
         <p:spPr>
           <a:xfrm>
-            <a:off x="566928" y="3383280"/>
-            <a:ext cx="1197864" cy="448056"/>
+            <a:off x="960119" y="5340096"/>
+            <a:ext cx="10588752" cy="658368"/>
           </a:xfrm>
           <a:prstGeom prst="rect">
             <a:avLst/>
@@ -4534,25 +3753,49 @@
           <a:p>
             <a:pPr algn="l">
               <a:lnSpc>
-                <a:spcPct val="112000"/>
-              </a:lnSpc>
-              <a:spcBef>
-                <a:spcPts val="0"/>
-              </a:spcBef>
-              <a:spcAft>
-                <a:spcPts val="0"/>
-              </a:spcAft>
-            </a:pPr>
-            <a:r>
-              <a:rPr sz="1670" b="1" lang="zh-CN">
-                <a:solidFill>
-                  <a:srgbClr val="205780"/>
-                </a:solidFill>
-                <a:latin typeface="Microsoft YaHei"/>
-                <a:ea typeface="Microsoft YaHei"/>
-                <a:cs typeface="Microsoft YaHei"/>
-              </a:rPr>
-              <a:t>容量边界</a:t>
+                <a:spcPct val="115000"/>
+              </a:lnSpc>
+              <a:spcBef>
+                <a:spcPts val="0"/>
+              </a:spcBef>
+              <a:spcAft>
+                <a:spcPts val="0"/>
+              </a:spcAft>
+            </a:pPr>
+            <a:r>
+              <a:rPr sz="2000" b="0" lang="zh-CN">
+                <a:solidFill>
+                  <a:srgbClr val="1B242F"/>
+                </a:solidFill>
+                <a:latin typeface="Microsoft YaHei"/>
+                <a:ea typeface="Microsoft YaHei"/>
+                <a:cs typeface="Microsoft YaHei"/>
+              </a:rPr>
+              <a:t>保留最终代码、结果、报告和会话记录；公共依赖共享只读，</a:t>
+            </a:r>
+          </a:p>
+          <a:p>
+            <a:pPr algn="l">
+              <a:lnSpc>
+                <a:spcPct val="115000"/>
+              </a:lnSpc>
+              <a:spcBef>
+                <a:spcPts val="0"/>
+              </a:spcBef>
+              <a:spcAft>
+                <a:spcPts val="0"/>
+              </a:spcAft>
+            </a:pPr>
+            <a:r>
+              <a:rPr sz="2000" b="0" lang="zh-CN">
+                <a:solidFill>
+                  <a:srgbClr val="1B242F"/>
+                </a:solidFill>
+                <a:latin typeface="Microsoft YaHei"/>
+                <a:ea typeface="Microsoft YaHei"/>
+                <a:cs typeface="Microsoft YaHei"/>
+              </a:rPr>
+              <a:t>避免每个任务重复保存一整套文件。</a:t>
             </a:r>
           </a:p>
         </p:txBody>
@@ -4565,8 +3808,8 @@
         </p:nvSpPr>
         <p:spPr>
           <a:xfrm>
-            <a:off x="1892807" y="3383280"/>
-            <a:ext cx="9738360" cy="448056"/>
+            <a:off x="676656" y="6016752"/>
+            <a:ext cx="210312" cy="320040"/>
           </a:xfrm>
           <a:prstGeom prst="rect">
             <a:avLst/>
@@ -4591,7 +3834,7 @@
               </a:spcAft>
             </a:pPr>
             <a:r>
-              <a:rPr sz="1670" b="0" lang="zh-CN">
+              <a:rPr sz="2000" b="0" lang="zh-CN">
                 <a:solidFill>
                   <a:srgbClr val="1B242F"/>
                 </a:solidFill>
@@ -4599,7 +3842,7 @@
                 <a:ea typeface="Microsoft YaHei"/>
                 <a:cs typeface="Microsoft YaHei"/>
               </a:rPr>
-              <a:t>sto-gen2 总容量 10.445 TB，服务端报送 inode 上限 318,767,099（约 3.19 亿）。</a:t>
+              <a:t>•</a:t>
             </a:r>
           </a:p>
         </p:txBody>
@@ -4612,8 +3855,8 @@
         </p:nvSpPr>
         <p:spPr>
           <a:xfrm>
-            <a:off x="566928" y="4599432"/>
-            <a:ext cx="1197864" cy="658368"/>
+            <a:off x="960119" y="6016752"/>
+            <a:ext cx="10588752" cy="658368"/>
           </a:xfrm>
           <a:prstGeom prst="rect">
             <a:avLst/>
@@ -4628,64 +3871,17 @@
           <a:p>
             <a:pPr algn="l">
               <a:lnSpc>
-                <a:spcPct val="112000"/>
-              </a:lnSpc>
-              <a:spcBef>
-                <a:spcPts val="0"/>
-              </a:spcBef>
-              <a:spcAft>
-                <a:spcPts val="0"/>
-              </a:spcAft>
-            </a:pPr>
-            <a:r>
-              <a:rPr sz="1650" b="1" lang="zh-CN">
-                <a:solidFill>
-                  <a:srgbClr val="1F715D"/>
-                </a:solidFill>
-                <a:latin typeface="Microsoft YaHei"/>
-                <a:ea typeface="Microsoft YaHei"/>
-                <a:cs typeface="Microsoft YaHei"/>
-              </a:rPr>
-              <a:t>自动清理</a:t>
-            </a:r>
-          </a:p>
-        </p:txBody>
-      </p:sp>
-      <p:sp>
-        <p:nvSpPr>
-          <p:cNvPr id="18" name="TextBox 17"/>
-          <p:cNvSpPr txBox="1"/>
-          <p:nvPr/>
-        </p:nvSpPr>
-        <p:spPr>
-          <a:xfrm>
-            <a:off x="1892807" y="4599432"/>
-            <a:ext cx="9738360" cy="658368"/>
-          </a:xfrm>
-          <a:prstGeom prst="rect">
-            <a:avLst/>
-          </a:prstGeom>
-          <a:noFill/>
-        </p:spPr>
-        <p:txBody>
-          <a:bodyPr wrap="square" anchor="t" lIns="0" rIns="0" tIns="0" bIns="0">
-            <a:noAutofit/>
-          </a:bodyPr>
-          <a:lstStyle/>
-          <a:p>
-            <a:pPr algn="l">
-              <a:lnSpc>
-                <a:spcPct val="112000"/>
-              </a:lnSpc>
-              <a:spcBef>
-                <a:spcPts val="0"/>
-              </a:spcBef>
-              <a:spcAft>
-                <a:spcPts val="0"/>
-              </a:spcAft>
-            </a:pPr>
-            <a:r>
-              <a:rPr sz="1650" b="0" lang="zh-CN">
+                <a:spcPct val="115000"/>
+              </a:lnSpc>
+              <a:spcBef>
+                <a:spcPts val="0"/>
+              </a:spcBef>
+              <a:spcAft>
+                <a:spcPts val="0"/>
+              </a:spcAft>
+            </a:pPr>
+            <a:r>
+              <a:rPr sz="2000" b="0" lang="zh-CN">
                 <a:solidFill>
                   <a:srgbClr val="1B242F"/>
                 </a:solidFill>
@@ -4693,23 +3889,23 @@
                 <a:ea typeface="Microsoft YaHei"/>
                 <a:cs typeface="Microsoft YaHei"/>
               </a:rPr>
-              <a:t>Job 收尾清 .cnagent_tmp；按仓库删 .runtime/venv、.cache、.git/子模块、ref、build、</a:t>
-            </a:r>
-          </a:p>
-          <a:p>
-            <a:pPr algn="l">
-              <a:lnSpc>
-                <a:spcPct val="112000"/>
-              </a:lnSpc>
-              <a:spcBef>
-                <a:spcPts val="0"/>
-              </a:spcBef>
-              <a:spcAft>
-                <a:spcPts val="0"/>
-              </a:spcAft>
-            </a:pPr>
-            <a:r>
-              <a:rPr sz="1650" b="0" lang="zh-CN">
+              <a:t>成功、失败、取消都执行清理，同时监控磁盘空间和 inode；</a:t>
+            </a:r>
+          </a:p>
+          <a:p>
+            <a:pPr algn="l">
+              <a:lnSpc>
+                <a:spcPct val="115000"/>
+              </a:lnSpc>
+              <a:spcBef>
+                <a:spcPts val="0"/>
+              </a:spcBef>
+              <a:spcAft>
+                <a:spcPts val="0"/>
+              </a:spcAft>
+            </a:pPr>
+            <a:r>
+              <a:rPr sz="2000" b="0" lang="zh-CN">
                 <a:solidFill>
                   <a:srgbClr val="1B242F"/>
                 </a:solidFill>
@@ -4717,266 +3913,7 @@
                 <a:ea typeface="Microsoft YaHei"/>
                 <a:cs typeface="Microsoft YaHei"/>
               </a:rPr>
-              <a:t>__pycache__、.pytest_cache；再清 .pt 张量、.cnperf-rep/.sqlite/.db/.cndump 数据及 core。</a:t>
-            </a:r>
-          </a:p>
-        </p:txBody>
-      </p:sp>
-      <p:sp>
-        <p:nvSpPr>
-          <p:cNvPr id="19" name="TextBox 18"/>
-          <p:cNvSpPr txBox="1"/>
-          <p:nvPr/>
-        </p:nvSpPr>
-        <p:spPr>
-          <a:xfrm>
-            <a:off x="566928" y="5385816"/>
-            <a:ext cx="1197864" cy="365760"/>
-          </a:xfrm>
-          <a:prstGeom prst="rect">
-            <a:avLst/>
-          </a:prstGeom>
-          <a:noFill/>
-        </p:spPr>
-        <p:txBody>
-          <a:bodyPr wrap="square" anchor="t" lIns="0" rIns="0" tIns="0" bIns="0">
-            <a:noAutofit/>
-          </a:bodyPr>
-          <a:lstStyle/>
-          <a:p>
-            <a:pPr algn="l">
-              <a:lnSpc>
-                <a:spcPct val="112000"/>
-              </a:lnSpc>
-              <a:spcBef>
-                <a:spcPts val="0"/>
-              </a:spcBef>
-              <a:spcAft>
-                <a:spcPts val="0"/>
-              </a:spcAft>
-            </a:pPr>
-            <a:r>
-              <a:rPr sz="1610" b="1" lang="zh-CN">
-                <a:solidFill>
-                  <a:srgbClr val="1F715D"/>
-                </a:solidFill>
-                <a:latin typeface="Microsoft YaHei"/>
-                <a:ea typeface="Microsoft YaHei"/>
-                <a:cs typeface="Microsoft YaHei"/>
-              </a:rPr>
-              <a:t>保留与兜底</a:t>
-            </a:r>
-          </a:p>
-        </p:txBody>
-      </p:sp>
-      <p:sp>
-        <p:nvSpPr>
-          <p:cNvPr id="20" name="TextBox 19"/>
-          <p:cNvSpPr txBox="1"/>
-          <p:nvPr/>
-        </p:nvSpPr>
-        <p:spPr>
-          <a:xfrm>
-            <a:off x="1892807" y="5385816"/>
-            <a:ext cx="9738360" cy="365760"/>
-          </a:xfrm>
-          <a:prstGeom prst="rect">
-            <a:avLst/>
-          </a:prstGeom>
-          <a:noFill/>
-        </p:spPr>
-        <p:txBody>
-          <a:bodyPr wrap="square" anchor="t" lIns="0" rIns="0" tIns="0" bIns="0">
-            <a:noAutofit/>
-          </a:bodyPr>
-          <a:lstStyle/>
-          <a:p>
-            <a:pPr algn="l">
-              <a:lnSpc>
-                <a:spcPct val="112000"/>
-              </a:lnSpc>
-              <a:spcBef>
-                <a:spcPts val="0"/>
-              </a:spcBef>
-              <a:spcAft>
-                <a:spcPts val="0"/>
-              </a:spcAft>
-            </a:pPr>
-            <a:r>
-              <a:rPr sz="1610" b="0" lang="zh-CN">
-                <a:solidFill>
-                  <a:srgbClr val="1B242F"/>
-                </a:solidFill>
-                <a:latin typeface="Microsoft YaHei"/>
-                <a:ea typeface="Microsoft YaHei"/>
-                <a:cs typeface="Microsoft YaHei"/>
-              </a:rPr>
-              <a:t>源码、结果和原生会话保留；trace 改软链接；成功/失败/取消均清，Scheduler 兜底。</a:t>
-            </a:r>
-          </a:p>
-        </p:txBody>
-      </p:sp>
-      <p:sp>
-        <p:nvSpPr>
-          <p:cNvPr id="21" name="TextBox 20"/>
-          <p:cNvSpPr txBox="1"/>
-          <p:nvPr/>
-        </p:nvSpPr>
-        <p:spPr>
-          <a:xfrm>
-            <a:off x="566928" y="5852160"/>
-            <a:ext cx="1197864" cy="603504"/>
-          </a:xfrm>
-          <a:prstGeom prst="rect">
-            <a:avLst/>
-          </a:prstGeom>
-          <a:noFill/>
-        </p:spPr>
-        <p:txBody>
-          <a:bodyPr wrap="square" anchor="t" lIns="0" rIns="0" tIns="0" bIns="0">
-            <a:noAutofit/>
-          </a:bodyPr>
-          <a:lstStyle/>
-          <a:p>
-            <a:pPr algn="l">
-              <a:lnSpc>
-                <a:spcPct val="112000"/>
-              </a:lnSpc>
-              <a:spcBef>
-                <a:spcPts val="0"/>
-              </a:spcBef>
-              <a:spcAft>
-                <a:spcPts val="0"/>
-              </a:spcAft>
-            </a:pPr>
-            <a:r>
-              <a:rPr sz="1610" b="1" lang="zh-CN">
-                <a:solidFill>
-                  <a:srgbClr val="1F715D"/>
-                </a:solidFill>
-                <a:latin typeface="Microsoft YaHei"/>
-                <a:ea typeface="Microsoft YaHei"/>
-                <a:cs typeface="Microsoft YaHei"/>
-              </a:rPr>
-              <a:t>治理后实证</a:t>
-            </a:r>
-          </a:p>
-        </p:txBody>
-      </p:sp>
-      <p:sp>
-        <p:nvSpPr>
-          <p:cNvPr id="22" name="TextBox 21"/>
-          <p:cNvSpPr txBox="1"/>
-          <p:nvPr/>
-        </p:nvSpPr>
-        <p:spPr>
-          <a:xfrm>
-            <a:off x="1892807" y="5852160"/>
-            <a:ext cx="9738360" cy="603504"/>
-          </a:xfrm>
-          <a:prstGeom prst="rect">
-            <a:avLst/>
-          </a:prstGeom>
-          <a:noFill/>
-        </p:spPr>
-        <p:txBody>
-          <a:bodyPr wrap="square" anchor="t" lIns="0" rIns="0" tIns="0" bIns="0">
-            <a:noAutofit/>
-          </a:bodyPr>
-          <a:lstStyle/>
-          <a:p>
-            <a:pPr algn="l">
-              <a:lnSpc>
-                <a:spcPct val="112000"/>
-              </a:lnSpc>
-              <a:spcBef>
-                <a:spcPts val="0"/>
-              </a:spcBef>
-              <a:spcAft>
-                <a:spcPts val="0"/>
-              </a:spcAft>
-            </a:pPr>
-            <a:r>
-              <a:rPr sz="1610" b="0" lang="zh-CN">
-                <a:solidFill>
-                  <a:srgbClr val="1B242F"/>
-                </a:solidFill>
-                <a:latin typeface="Microsoft YaHei"/>
-                <a:ea typeface="Microsoft YaHei"/>
-                <a:cs typeface="Microsoft YaHei"/>
-              </a:rPr>
-              <a:t>Job …7x4W 已清 69 个临时目录＋13 条产物路径，生成代码和会话仍保留。</a:t>
-            </a:r>
-          </a:p>
-          <a:p>
-            <a:pPr algn="l">
-              <a:lnSpc>
-                <a:spcPct val="112000"/>
-              </a:lnSpc>
-              <a:spcBef>
-                <a:spcPts val="0"/>
-              </a:spcBef>
-              <a:spcAft>
-                <a:spcPts val="0"/>
-              </a:spcAft>
-            </a:pPr>
-            <a:r>
-              <a:rPr sz="1610" b="0" lang="zh-CN">
-                <a:solidFill>
-                  <a:srgbClr val="1B242F"/>
-                </a:solidFill>
-                <a:latin typeface="Microsoft YaHei"/>
-                <a:ea typeface="Microsoft YaHei"/>
-                <a:cs typeface="Microsoft YaHei"/>
-              </a:rPr>
-              <a:t>当前 inode：已用 84,791,781（26.6%），剩余 233,975,318；这是清理启用后的快照。</a:t>
-            </a:r>
-          </a:p>
-        </p:txBody>
-      </p:sp>
-      <p:sp>
-        <p:nvSpPr>
-          <p:cNvPr id="23" name="TextBox 22"/>
-          <p:cNvSpPr txBox="1"/>
-          <p:nvPr/>
-        </p:nvSpPr>
-        <p:spPr>
-          <a:xfrm>
-            <a:off x="566928" y="6556248"/>
-            <a:ext cx="11064240" cy="210312"/>
-          </a:xfrm>
-          <a:prstGeom prst="rect">
-            <a:avLst/>
-          </a:prstGeom>
-          <a:noFill/>
-        </p:spPr>
-        <p:txBody>
-          <a:bodyPr wrap="square" anchor="t" lIns="0" rIns="0" tIns="0" bIns="0">
-            <a:noAutofit/>
-          </a:bodyPr>
-          <a:lstStyle/>
-          <a:p>
-            <a:pPr algn="l">
-              <a:lnSpc>
-                <a:spcPct val="112000"/>
-              </a:lnSpc>
-              <a:spcBef>
-                <a:spcPts val="0"/>
-              </a:spcBef>
-              <a:spcAft>
-                <a:spcPts val="0"/>
-              </a:spcAft>
-            </a:pPr>
-            <a:r>
-              <a:rPr sz="900" b="0" lang="zh-CN">
-                <a:solidFill>
-                  <a:srgbClr val="646E79"/>
-                </a:solidFill>
-                <a:latin typeface="Microsoft YaHei"/>
-                <a:ea typeface="Microsoft YaHei"/>
-                <a:cs typeface="Microsoft YaHei"/>
-              </a:rPr>
-              <a:t>依据：5cc0a1f、3aeb40c；Job …7x4W 收尾日志（09-08）；df -i 快照 2026-09-09 15:15。NFS 报送额度非 SSD 物理上限。</a:t>
+              <a:t>让小文件随任务结束被回收，不随历史任务永久堆积。</a:t>
             </a:r>
           </a:p>
         </p:txBody>
@@ -5015,8 +3952,8 @@
         </p:nvSpPr>
         <p:spPr>
           <a:xfrm>
-            <a:off x="566928" y="318211"/>
-            <a:ext cx="521207" cy="448056"/>
+            <a:off x="640080" y="365760"/>
+            <a:ext cx="594360" cy="548640"/>
           </a:xfrm>
           <a:prstGeom prst="rect">
             <a:avLst/>
@@ -5041,7 +3978,7 @@
               </a:spcAft>
             </a:pPr>
             <a:r>
-              <a:rPr sz="2600" b="1" lang="zh-CN">
+              <a:rPr sz="2800" b="1" lang="zh-CN">
                 <a:solidFill>
                   <a:srgbClr val="205780"/>
                 </a:solidFill>
@@ -5062,8 +3999,8 @@
         </p:nvSpPr>
         <p:spPr>
           <a:xfrm>
-            <a:off x="1307592" y="301752"/>
-            <a:ext cx="10323576" cy="484632"/>
+            <a:off x="1389888" y="356616"/>
+            <a:ext cx="10158984" cy="576072"/>
           </a:xfrm>
           <a:prstGeom prst="rect">
             <a:avLst/>
@@ -5088,29 +4025,50 @@
               </a:spcAft>
             </a:pPr>
             <a:r>
-              <a:rPr sz="2700" b="1" lang="zh-CN">
-                <a:solidFill>
-                  <a:srgbClr val="16324C"/>
-                </a:solidFill>
-                <a:latin typeface="Microsoft YaHei"/>
-                <a:ea typeface="Microsoft YaHei"/>
-                <a:cs typeface="Microsoft YaHei"/>
-              </a:rPr>
-              <a:t>API 半路出错：已吐出内容，也不代表本轮成功</a:t>
-            </a:r>
-          </a:p>
-        </p:txBody>
-      </p:sp>
-      <p:sp>
-        <p:nvSpPr>
-          <p:cNvPr id="4" name="TextBox 3"/>
+              <a:rPr sz="2800" b="1" lang="zh-CN">
+                <a:solidFill>
+                  <a:srgbClr val="1B242F"/>
+                </a:solidFill>
+                <a:latin typeface="Microsoft YaHei"/>
+                <a:ea typeface="Microsoft YaHei"/>
+                <a:cs typeface="Microsoft YaHei"/>
+              </a:rPr>
+              <a:t>API 异常：输出到一半，任务突然中断</a:t>
+            </a:r>
+          </a:p>
+        </p:txBody>
+      </p:sp>
+      <p:cxnSp>
+        <p:nvCxnSpPr>
+          <p:cNvPr id="4" name="Connector 3"/>
+          <p:cNvCxnSpPr/>
+          <p:nvPr/>
+        </p:nvCxnSpPr>
+        <p:spPr>
+          <a:xfrm>
+            <a:off x="640080" y="1024128"/>
+            <a:ext cx="10908792" cy="0"/>
+          </a:xfrm>
+          <a:prstGeom prst="line">
+            <a:avLst/>
+          </a:prstGeom>
+          <a:ln w="13970">
+            <a:solidFill>
+              <a:srgbClr val="205780"/>
+            </a:solidFill>
+          </a:ln>
+        </p:spPr>
+      </p:cxnSp>
+      <p:sp>
+        <p:nvSpPr>
+          <p:cNvPr id="5" name="TextBox 4"/>
           <p:cNvSpPr txBox="1"/>
           <p:nvPr/>
         </p:nvSpPr>
         <p:spPr>
           <a:xfrm>
-            <a:off x="566928" y="923544"/>
-            <a:ext cx="11064240" cy="292608"/>
+            <a:off x="640080" y="1216152"/>
+            <a:ext cx="10908792" cy="393192"/>
           </a:xfrm>
           <a:prstGeom prst="rect">
             <a:avLst/>
@@ -5135,50 +4093,50 @@
               </a:spcAft>
             </a:pPr>
             <a:r>
-              <a:rPr sz="1610" b="0" lang="zh-CN">
-                <a:solidFill>
-                  <a:srgbClr val="646E79"/>
-                </a:solidFill>
-                <a:latin typeface="Microsoft YaHei"/>
-                <a:ea typeface="Microsoft YaHei"/>
-                <a:cs typeface="Microsoft YaHei"/>
-              </a:rPr>
-              <a:t>错误来自 HTTP、SSE 事件或网络传输，形式不同；自动恢复能续跑，但不等于无损恢复。</a:t>
+              <a:rPr sz="2100" b="1" lang="zh-CN">
+                <a:solidFill>
+                  <a:srgbClr val="205780"/>
+                </a:solidFill>
+                <a:latin typeface="Microsoft YaHei"/>
+                <a:ea typeface="Microsoft YaHei"/>
+                <a:cs typeface="Microsoft YaHei"/>
+              </a:rPr>
+              <a:t>问题：</a:t>
             </a:r>
           </a:p>
         </p:txBody>
       </p:sp>
       <p:cxnSp>
         <p:nvCxnSpPr>
-          <p:cNvPr id="5" name="Connector 4"/>
+          <p:cNvPr id="6" name="Connector 5"/>
           <p:cNvCxnSpPr/>
           <p:nvPr/>
         </p:nvCxnSpPr>
         <p:spPr>
           <a:xfrm>
-            <a:off x="566928" y="1307592"/>
-            <a:ext cx="11064240" cy="0"/>
+            <a:off x="640080" y="3995928"/>
+            <a:ext cx="10908792" cy="0"/>
           </a:xfrm>
           <a:prstGeom prst="line">
             <a:avLst/>
           </a:prstGeom>
-          <a:ln w="15875">
+          <a:ln w="10160">
             <a:solidFill>
-              <a:srgbClr val="16324C"/>
+              <a:srgbClr val="CBD4DB"/>
             </a:solidFill>
           </a:ln>
         </p:spPr>
       </p:cxnSp>
       <p:sp>
         <p:nvSpPr>
-          <p:cNvPr id="6" name="TextBox 5"/>
+          <p:cNvPr id="7" name="TextBox 6"/>
           <p:cNvSpPr txBox="1"/>
           <p:nvPr/>
         </p:nvSpPr>
         <p:spPr>
           <a:xfrm>
-            <a:off x="566928" y="1463040"/>
-            <a:ext cx="4023360" cy="310896"/>
+            <a:off x="640080" y="4187952"/>
+            <a:ext cx="10908792" cy="393192"/>
           </a:xfrm>
           <a:prstGeom prst="rect">
             <a:avLst/>
@@ -5203,29 +4161,29 @@
               </a:spcAft>
             </a:pPr>
             <a:r>
-              <a:rPr sz="1800" b="1" lang="zh-CN">
-                <a:solidFill>
-                  <a:srgbClr val="205780"/>
-                </a:solidFill>
-                <a:latin typeface="Microsoft YaHei"/>
-                <a:ea typeface="Microsoft YaHei"/>
-                <a:cs typeface="Microsoft YaHei"/>
-              </a:rPr>
-              <a:t>问题与发现</a:t>
-            </a:r>
-          </a:p>
-        </p:txBody>
-      </p:sp>
-      <p:sp>
-        <p:nvSpPr>
-          <p:cNvPr id="7" name="TextBox 6"/>
+              <a:rPr sz="2100" b="1" lang="zh-CN">
+                <a:solidFill>
+                  <a:srgbClr val="1F715D"/>
+                </a:solidFill>
+                <a:latin typeface="Microsoft YaHei"/>
+                <a:ea typeface="Microsoft YaHei"/>
+                <a:cs typeface="Microsoft YaHei"/>
+              </a:rPr>
+              <a:t>解决办法：</a:t>
+            </a:r>
+          </a:p>
+        </p:txBody>
+      </p:sp>
+      <p:sp>
+        <p:nvSpPr>
+          <p:cNvPr id="8" name="TextBox 7"/>
           <p:cNvSpPr txBox="1"/>
           <p:nvPr/>
         </p:nvSpPr>
         <p:spPr>
           <a:xfrm>
-            <a:off x="4572000" y="1504188"/>
-            <a:ext cx="7059168" cy="228600"/>
+            <a:off x="676656" y="1682496"/>
+            <a:ext cx="10872216" cy="384048"/>
           </a:xfrm>
           <a:prstGeom prst="rect">
             <a:avLst/>
@@ -5238,7 +4196,7 @@
           </a:bodyPr>
           <a:lstStyle/>
           <a:p>
-            <a:pPr algn="r">
+            <a:pPr algn="l">
               <a:lnSpc>
                 <a:spcPct val="112000"/>
               </a:lnSpc>
@@ -5250,40 +4208,19 @@
               </a:spcAft>
             </a:pPr>
             <a:r>
-              <a:rPr sz="1120" b="0" lang="zh-CN">
-                <a:solidFill>
-                  <a:srgbClr val="646E79"/>
-                </a:solidFill>
-                <a:latin typeface="Microsoft YaHei"/>
-                <a:ea typeface="Microsoft YaHei"/>
-                <a:cs typeface="Microsoft YaHei"/>
-              </a:rPr>
-              <a:t>线上已见 + 源码识别/测试覆盖；详见证据清单</a:t>
-            </a:r>
-          </a:p>
-        </p:txBody>
-      </p:sp>
-      <p:cxnSp>
-        <p:nvCxnSpPr>
-          <p:cNvPr id="8" name="Connector 7"/>
-          <p:cNvCxnSpPr/>
-          <p:nvPr/>
-        </p:nvCxnSpPr>
-        <p:spPr>
-          <a:xfrm>
-            <a:off x="566928" y="4023360"/>
-            <a:ext cx="11064240" cy="0"/>
-          </a:xfrm>
-          <a:prstGeom prst="line">
-            <a:avLst/>
-          </a:prstGeom>
-          <a:ln w="11430">
-            <a:solidFill>
-              <a:srgbClr val="CBD4DB"/>
-            </a:solidFill>
-          </a:ln>
-        </p:spPr>
-      </p:cxnSp>
+              <a:rPr sz="1960" b="0" lang="zh-CN">
+                <a:solidFill>
+                  <a:srgbClr val="1B242F"/>
+                </a:solidFill>
+                <a:latin typeface="Microsoft YaHei"/>
+                <a:ea typeface="Microsoft YaHei"/>
+                <a:cs typeface="Microsoft YaHei"/>
+              </a:rPr>
+              <a:t>不同厂商报错各异；流式输出到一半，仍可能因过载、限流或断线失败。</a:t>
+            </a:r>
+          </a:p>
+        </p:txBody>
+      </p:sp>
       <p:sp>
         <p:nvSpPr>
           <p:cNvPr id="9" name="TextBox 8"/>
@@ -5292,8 +4229,8 @@
         </p:nvSpPr>
         <p:spPr>
           <a:xfrm>
-            <a:off x="566928" y="4187952"/>
-            <a:ext cx="4023360" cy="310896"/>
+            <a:off x="676656" y="2185416"/>
+            <a:ext cx="1261872" cy="265176"/>
           </a:xfrm>
           <a:prstGeom prst="rect">
             <a:avLst/>
@@ -5318,15 +4255,15 @@
               </a:spcAft>
             </a:pPr>
             <a:r>
-              <a:rPr sz="1800" b="1" lang="zh-CN">
-                <a:solidFill>
-                  <a:srgbClr val="1F715D"/>
-                </a:solidFill>
-                <a:latin typeface="Microsoft YaHei"/>
-                <a:ea typeface="Microsoft YaHei"/>
-                <a:cs typeface="Microsoft YaHei"/>
-              </a:rPr>
-              <a:t>解决方案与变化</a:t>
+              <a:rPr sz="1560" b="1" lang="zh-CN">
+                <a:solidFill>
+                  <a:srgbClr val="205780"/>
+                </a:solidFill>
+                <a:latin typeface="Microsoft YaHei"/>
+                <a:ea typeface="Microsoft YaHei"/>
+                <a:cs typeface="Microsoft YaHei"/>
+              </a:rPr>
+              <a:t>模型过载</a:t>
             </a:r>
           </a:p>
         </p:txBody>
@@ -5339,8 +4276,8 @@
         </p:nvSpPr>
         <p:spPr>
           <a:xfrm>
-            <a:off x="4572000" y="4229100"/>
-            <a:ext cx="7059168" cy="228600"/>
+            <a:off x="2029967" y="2185416"/>
+            <a:ext cx="9518904" cy="265176"/>
           </a:xfrm>
           <a:prstGeom prst="rect">
             <a:avLst/>
@@ -5353,27 +4290,27 @@
           </a:bodyPr>
           <a:lstStyle/>
           <a:p>
-            <a:pPr algn="r">
-              <a:lnSpc>
-                <a:spcPct val="112000"/>
-              </a:lnSpc>
-              <a:spcBef>
-                <a:spcPts val="0"/>
-              </a:spcBef>
-              <a:spcAft>
-                <a:spcPts val="0"/>
-              </a:spcAft>
-            </a:pPr>
-            <a:r>
-              <a:rPr sz="1120" b="0" lang="zh-CN">
-                <a:solidFill>
-                  <a:srgbClr val="646E79"/>
-                </a:solidFill>
-                <a:latin typeface="Microsoft YaHei"/>
-                <a:ea typeface="Microsoft YaHei"/>
-                <a:cs typeface="Microsoft YaHei"/>
-              </a:rPr>
-              <a:t>默认完整缓冲已实现；主 session 恢复仍有损</a:t>
+            <a:pPr algn="l">
+              <a:lnSpc>
+                <a:spcPct val="105000"/>
+              </a:lnSpc>
+              <a:spcBef>
+                <a:spcPts val="0"/>
+              </a:spcBef>
+              <a:spcAft>
+                <a:spcPts val="0"/>
+              </a:spcAft>
+            </a:pPr>
+            <a:r>
+              <a:rPr sz="1530" b="0" lang="zh-CN">
+                <a:solidFill>
+                  <a:srgbClr val="1B242F"/>
+                </a:solidFill>
+                <a:latin typeface="Microsoft YaHei"/>
+                <a:ea typeface="Microsoft YaHei"/>
+                <a:cs typeface="Microsoft YaHei"/>
+              </a:rPr>
+              <a:t>at capacity / model_at_capacity / server_is_at_capacity / server_is_overloaded / capacity_error</a:t>
             </a:r>
           </a:p>
         </p:txBody>
@@ -5386,8 +4323,8 @@
         </p:nvSpPr>
         <p:spPr>
           <a:xfrm>
-            <a:off x="566928" y="1856231"/>
-            <a:ext cx="11064240" cy="338328"/>
+            <a:off x="676656" y="2468880"/>
+            <a:ext cx="1261872" cy="265176"/>
           </a:xfrm>
           <a:prstGeom prst="rect">
             <a:avLst/>
@@ -5412,15 +4349,15 @@
               </a:spcAft>
             </a:pPr>
             <a:r>
-              <a:rPr sz="1639" b="1" lang="zh-CN">
-                <a:solidFill>
-                  <a:srgbClr val="1B242F"/>
-                </a:solidFill>
-                <a:latin typeface="Microsoft YaHei"/>
-                <a:ea typeface="Microsoft YaHei"/>
-                <a:cs typeface="Microsoft YaHei"/>
-              </a:rPr>
-              <a:t>怎么发现：650 条 capacity 事件仍是 HTTP 200；还见断流、缺少完成事件，不能只看状态码。</a:t>
+              <a:rPr sz="1560" b="1" lang="zh-CN">
+                <a:solidFill>
+                  <a:srgbClr val="205780"/>
+                </a:solidFill>
+                <a:latin typeface="Microsoft YaHei"/>
+                <a:ea typeface="Microsoft YaHei"/>
+                <a:cs typeface="Microsoft YaHei"/>
+              </a:rPr>
+              <a:t>限流</a:t>
             </a:r>
           </a:p>
         </p:txBody>
@@ -5433,8 +4370,8 @@
         </p:nvSpPr>
         <p:spPr>
           <a:xfrm>
-            <a:off x="566928" y="2212848"/>
-            <a:ext cx="1289304" cy="252374"/>
+            <a:off x="2029967" y="2468880"/>
+            <a:ext cx="9518904" cy="265176"/>
           </a:xfrm>
           <a:prstGeom prst="rect">
             <a:avLst/>
@@ -5449,25 +4386,25 @@
           <a:p>
             <a:pPr algn="l">
               <a:lnSpc>
-                <a:spcPct val="112000"/>
-              </a:lnSpc>
-              <a:spcBef>
-                <a:spcPts val="0"/>
-              </a:spcBef>
-              <a:spcAft>
-                <a:spcPts val="0"/>
-              </a:spcAft>
-            </a:pPr>
-            <a:r>
-              <a:rPr sz="1470" b="1" lang="zh-CN">
-                <a:solidFill>
-                  <a:srgbClr val="205780"/>
-                </a:solidFill>
-                <a:latin typeface="Microsoft YaHei"/>
-                <a:ea typeface="Microsoft YaHei"/>
-                <a:cs typeface="Microsoft YaHei"/>
-              </a:rPr>
-              <a:t>模型过载</a:t>
+                <a:spcPct val="105000"/>
+              </a:lnSpc>
+              <a:spcBef>
+                <a:spcPts val="0"/>
+              </a:spcBef>
+              <a:spcAft>
+                <a:spcPts val="0"/>
+              </a:spcAft>
+            </a:pPr>
+            <a:r>
+              <a:rPr sz="1530" b="0" lang="zh-CN">
+                <a:solidFill>
+                  <a:srgbClr val="1B242F"/>
+                </a:solidFill>
+                <a:latin typeface="Microsoft YaHei"/>
+                <a:ea typeface="Microsoft YaHei"/>
+                <a:cs typeface="Microsoft YaHei"/>
+              </a:rPr>
+              <a:t>429 / rate_limit_exceeded / rate_limited / too_many_requests</a:t>
             </a:r>
           </a:p>
         </p:txBody>
@@ -5480,8 +4417,8 @@
         </p:nvSpPr>
         <p:spPr>
           <a:xfrm>
-            <a:off x="1920240" y="2212848"/>
-            <a:ext cx="9710928" cy="252374"/>
+            <a:off x="676656" y="2752344"/>
+            <a:ext cx="1261872" cy="265176"/>
           </a:xfrm>
           <a:prstGeom prst="rect">
             <a:avLst/>
@@ -5496,60 +4433,39 @@
           <a:p>
             <a:pPr algn="l">
               <a:lnSpc>
-                <a:spcPct val="104000"/>
-              </a:lnSpc>
-              <a:spcBef>
-                <a:spcPts val="0"/>
-              </a:spcBef>
-              <a:spcAft>
-                <a:spcPts val="0"/>
-              </a:spcAft>
-            </a:pPr>
-            <a:r>
-              <a:rPr sz="1465" b="0" lang="zh-CN">
-                <a:solidFill>
-                  <a:srgbClr val="1B242F"/>
-                </a:solidFill>
-                <a:latin typeface="Microsoft YaHei"/>
-                <a:ea typeface="Microsoft YaHei"/>
-                <a:cs typeface="Microsoft YaHei"/>
-              </a:rPr>
-              <a:t>model_at_capacity / server_is_at_capacity / server_is_overloaded / capacity_error / at capacity</a:t>
-            </a:r>
-          </a:p>
-        </p:txBody>
-      </p:sp>
-      <p:cxnSp>
-        <p:nvCxnSpPr>
-          <p:cNvPr id="14" name="Connector 13"/>
-          <p:cNvCxnSpPr/>
-          <p:nvPr/>
-        </p:nvCxnSpPr>
-        <p:spPr>
-          <a:xfrm>
-            <a:off x="566928" y="2450591"/>
-            <a:ext cx="11064240" cy="0"/>
-          </a:xfrm>
-          <a:prstGeom prst="line">
-            <a:avLst/>
-          </a:prstGeom>
-          <a:ln w="5080">
-            <a:solidFill>
-              <a:srgbClr val="E5E9ED"/>
-            </a:solidFill>
-          </a:ln>
-        </p:spPr>
-      </p:cxnSp>
-      <p:sp>
-        <p:nvSpPr>
-          <p:cNvPr id="15" name="TextBox 14"/>
+                <a:spcPct val="112000"/>
+              </a:lnSpc>
+              <a:spcBef>
+                <a:spcPts val="0"/>
+              </a:spcBef>
+              <a:spcAft>
+                <a:spcPts val="0"/>
+              </a:spcAft>
+            </a:pPr>
+            <a:r>
+              <a:rPr sz="1560" b="1" lang="zh-CN">
+                <a:solidFill>
+                  <a:srgbClr val="205780"/>
+                </a:solidFill>
+                <a:latin typeface="Microsoft YaHei"/>
+                <a:ea typeface="Microsoft YaHei"/>
+                <a:cs typeface="Microsoft YaHei"/>
+              </a:rPr>
+              <a:t>鉴权与权限</a:t>
+            </a:r>
+          </a:p>
+        </p:txBody>
+      </p:sp>
+      <p:sp>
+        <p:nvSpPr>
+          <p:cNvPr id="14" name="TextBox 13"/>
           <p:cNvSpPr txBox="1"/>
           <p:nvPr/>
         </p:nvSpPr>
         <p:spPr>
           <a:xfrm>
-            <a:off x="566928" y="2465222"/>
-            <a:ext cx="1289304" cy="252374"/>
+            <a:off x="2029967" y="2752344"/>
+            <a:ext cx="9518904" cy="265176"/>
           </a:xfrm>
           <a:prstGeom prst="rect">
             <a:avLst/>
@@ -5564,39 +4480,39 @@
           <a:p>
             <a:pPr algn="l">
               <a:lnSpc>
-                <a:spcPct val="112000"/>
-              </a:lnSpc>
-              <a:spcBef>
-                <a:spcPts val="0"/>
-              </a:spcBef>
-              <a:spcAft>
-                <a:spcPts val="0"/>
-              </a:spcAft>
-            </a:pPr>
-            <a:r>
-              <a:rPr sz="1470" b="1" lang="zh-CN">
-                <a:solidFill>
-                  <a:srgbClr val="205780"/>
-                </a:solidFill>
-                <a:latin typeface="Microsoft YaHei"/>
-                <a:ea typeface="Microsoft YaHei"/>
-                <a:cs typeface="Microsoft YaHei"/>
-              </a:rPr>
-              <a:t>限流与鉴权</a:t>
-            </a:r>
-          </a:p>
-        </p:txBody>
-      </p:sp>
-      <p:sp>
-        <p:nvSpPr>
-          <p:cNvPr id="16" name="TextBox 15"/>
+                <a:spcPct val="105000"/>
+              </a:lnSpc>
+              <a:spcBef>
+                <a:spcPts val="0"/>
+              </a:spcBef>
+              <a:spcAft>
+                <a:spcPts val="0"/>
+              </a:spcAft>
+            </a:pPr>
+            <a:r>
+              <a:rPr sz="1530" b="0" lang="zh-CN">
+                <a:solidFill>
+                  <a:srgbClr val="1B242F"/>
+                </a:solidFill>
+                <a:latin typeface="Microsoft YaHei"/>
+                <a:ea typeface="Microsoft YaHei"/>
+                <a:cs typeface="Microsoft YaHei"/>
+              </a:rPr>
+              <a:t>401 / 403 / invalid_api_key / Authentication failed / permission denied</a:t>
+            </a:r>
+          </a:p>
+        </p:txBody>
+      </p:sp>
+      <p:sp>
+        <p:nvSpPr>
+          <p:cNvPr id="15" name="TextBox 14"/>
           <p:cNvSpPr txBox="1"/>
           <p:nvPr/>
         </p:nvSpPr>
         <p:spPr>
           <a:xfrm>
-            <a:off x="1920240" y="2465222"/>
-            <a:ext cx="9710928" cy="252374"/>
+            <a:off x="676656" y="3035808"/>
+            <a:ext cx="1261872" cy="265176"/>
           </a:xfrm>
           <a:prstGeom prst="rect">
             <a:avLst/>
@@ -5611,60 +4527,39 @@
           <a:p>
             <a:pPr algn="l">
               <a:lnSpc>
-                <a:spcPct val="104000"/>
-              </a:lnSpc>
-              <a:spcBef>
-                <a:spcPts val="0"/>
-              </a:spcBef>
-              <a:spcAft>
-                <a:spcPts val="0"/>
-              </a:spcAft>
-            </a:pPr>
-            <a:r>
-              <a:rPr sz="1465" b="0" lang="zh-CN">
-                <a:solidFill>
-                  <a:srgbClr val="1B242F"/>
-                </a:solidFill>
-                <a:latin typeface="Microsoft YaHei"/>
-                <a:ea typeface="Microsoft YaHei"/>
-                <a:cs typeface="Microsoft YaHei"/>
-              </a:rPr>
-              <a:t>429 / rate_limit_exceeded / rate_limited / too_many_requests；401 / 403 / invalid_api_key</a:t>
-            </a:r>
-          </a:p>
-        </p:txBody>
-      </p:sp>
-      <p:cxnSp>
-        <p:nvCxnSpPr>
-          <p:cNvPr id="17" name="Connector 16"/>
-          <p:cNvCxnSpPr/>
-          <p:nvPr/>
-        </p:nvCxnSpPr>
-        <p:spPr>
-          <a:xfrm>
-            <a:off x="566928" y="2702966"/>
-            <a:ext cx="11064240" cy="0"/>
-          </a:xfrm>
-          <a:prstGeom prst="line">
-            <a:avLst/>
-          </a:prstGeom>
-          <a:ln w="5080">
-            <a:solidFill>
-              <a:srgbClr val="E5E9ED"/>
-            </a:solidFill>
-          </a:ln>
-        </p:spPr>
-      </p:cxnSp>
-      <p:sp>
-        <p:nvSpPr>
-          <p:cNvPr id="18" name="TextBox 17"/>
+                <a:spcPct val="112000"/>
+              </a:lnSpc>
+              <a:spcBef>
+                <a:spcPts val="0"/>
+              </a:spcBef>
+              <a:spcAft>
+                <a:spcPts val="0"/>
+              </a:spcAft>
+            </a:pPr>
+            <a:r>
+              <a:rPr sz="1560" b="1" lang="zh-CN">
+                <a:solidFill>
+                  <a:srgbClr val="205780"/>
+                </a:solidFill>
+                <a:latin typeface="Microsoft YaHei"/>
+                <a:ea typeface="Microsoft YaHei"/>
+                <a:cs typeface="Microsoft YaHei"/>
+              </a:rPr>
+              <a:t>服务与网关</a:t>
+            </a:r>
+          </a:p>
+        </p:txBody>
+      </p:sp>
+      <p:sp>
+        <p:nvSpPr>
+          <p:cNvPr id="16" name="TextBox 15"/>
           <p:cNvSpPr txBox="1"/>
           <p:nvPr/>
         </p:nvSpPr>
         <p:spPr>
           <a:xfrm>
-            <a:off x="566928" y="2717596"/>
-            <a:ext cx="1289304" cy="484632"/>
+            <a:off x="2029967" y="3035808"/>
+            <a:ext cx="9518904" cy="265176"/>
           </a:xfrm>
           <a:prstGeom prst="rect">
             <a:avLst/>
@@ -5679,39 +4574,39 @@
           <a:p>
             <a:pPr algn="l">
               <a:lnSpc>
-                <a:spcPct val="112000"/>
-              </a:lnSpc>
-              <a:spcBef>
-                <a:spcPts val="0"/>
-              </a:spcBef>
-              <a:spcAft>
-                <a:spcPts val="0"/>
-              </a:spcAft>
-            </a:pPr>
-            <a:r>
-              <a:rPr sz="1470" b="1" lang="zh-CN">
-                <a:solidFill>
-                  <a:srgbClr val="205780"/>
-                </a:solidFill>
-                <a:latin typeface="Microsoft YaHei"/>
-                <a:ea typeface="Microsoft YaHei"/>
-                <a:cs typeface="Microsoft YaHei"/>
-              </a:rPr>
-              <a:t>服务与网关</a:t>
-            </a:r>
-          </a:p>
-        </p:txBody>
-      </p:sp>
-      <p:sp>
-        <p:nvSpPr>
-          <p:cNvPr id="19" name="TextBox 18"/>
+                <a:spcPct val="105000"/>
+              </a:lnSpc>
+              <a:spcBef>
+                <a:spcPts val="0"/>
+              </a:spcBef>
+              <a:spcAft>
+                <a:spcPts val="0"/>
+              </a:spcAft>
+            </a:pPr>
+            <a:r>
+              <a:rPr sz="1530" b="0" lang="zh-CN">
+                <a:solidFill>
+                  <a:srgbClr val="1B242F"/>
+                </a:solidFill>
+                <a:latin typeface="Microsoft YaHei"/>
+                <a:ea typeface="Microsoft YaHei"/>
+                <a:cs typeface="Microsoft YaHei"/>
+              </a:rPr>
+              <a:t>500 / 502 / 503 / 504 / 507 / 520；server_error / internal_server_error / bad_gateway</a:t>
+            </a:r>
+          </a:p>
+        </p:txBody>
+      </p:sp>
+      <p:sp>
+        <p:nvSpPr>
+          <p:cNvPr id="17" name="TextBox 16"/>
           <p:cNvSpPr txBox="1"/>
           <p:nvPr/>
         </p:nvSpPr>
         <p:spPr>
           <a:xfrm>
-            <a:off x="1920240" y="2717596"/>
-            <a:ext cx="9710928" cy="484632"/>
+            <a:off x="676656" y="3319272"/>
+            <a:ext cx="1261872" cy="265176"/>
           </a:xfrm>
           <a:prstGeom prst="rect">
             <a:avLst/>
@@ -5726,84 +4621,39 @@
           <a:p>
             <a:pPr algn="l">
               <a:lnSpc>
-                <a:spcPct val="104000"/>
-              </a:lnSpc>
-              <a:spcBef>
-                <a:spcPts val="0"/>
-              </a:spcBef>
-              <a:spcAft>
-                <a:spcPts val="0"/>
-              </a:spcAft>
-            </a:pPr>
-            <a:r>
-              <a:rPr sz="1465" b="0" lang="zh-CN">
-                <a:solidFill>
-                  <a:srgbClr val="1B242F"/>
-                </a:solidFill>
-                <a:latin typeface="Microsoft YaHei"/>
-                <a:ea typeface="Microsoft YaHei"/>
-                <a:cs typeface="Microsoft YaHei"/>
-              </a:rPr>
-              <a:t>500 / 502 / 503 / 504 / 507 / 520；server_error / internal_server_error</a:t>
-            </a:r>
-          </a:p>
-          <a:p>
-            <a:pPr algn="l">
-              <a:lnSpc>
-                <a:spcPct val="104000"/>
-              </a:lnSpc>
-              <a:spcBef>
-                <a:spcPts val="0"/>
-              </a:spcBef>
-              <a:spcAft>
-                <a:spcPts val="0"/>
-              </a:spcAft>
-            </a:pPr>
-            <a:r>
-              <a:rPr sz="1465" b="0" lang="zh-CN">
-                <a:solidFill>
-                  <a:srgbClr val="1B242F"/>
-                </a:solidFill>
-                <a:latin typeface="Microsoft YaHei"/>
-                <a:ea typeface="Microsoft YaHei"/>
-                <a:cs typeface="Microsoft YaHei"/>
-              </a:rPr>
-              <a:t>service_unavailable / bad_gateway / gateway_timeout</a:t>
-            </a:r>
-          </a:p>
-        </p:txBody>
-      </p:sp>
-      <p:cxnSp>
-        <p:nvCxnSpPr>
-          <p:cNvPr id="20" name="Connector 19"/>
-          <p:cNvCxnSpPr/>
-          <p:nvPr/>
-        </p:nvCxnSpPr>
-        <p:spPr>
-          <a:xfrm>
-            <a:off x="566928" y="3187598"/>
-            <a:ext cx="11064240" cy="0"/>
-          </a:xfrm>
-          <a:prstGeom prst="line">
-            <a:avLst/>
-          </a:prstGeom>
-          <a:ln w="5080">
-            <a:solidFill>
-              <a:srgbClr val="E5E9ED"/>
-            </a:solidFill>
-          </a:ln>
-        </p:spPr>
-      </p:cxnSp>
-      <p:sp>
-        <p:nvSpPr>
-          <p:cNvPr id="21" name="TextBox 20"/>
+                <a:spcPct val="112000"/>
+              </a:lnSpc>
+              <a:spcBef>
+                <a:spcPts val="0"/>
+              </a:spcBef>
+              <a:spcAft>
+                <a:spcPts val="0"/>
+              </a:spcAft>
+            </a:pPr>
+            <a:r>
+              <a:rPr sz="1560" b="1" lang="zh-CN">
+                <a:solidFill>
+                  <a:srgbClr val="205780"/>
+                </a:solidFill>
+                <a:latin typeface="Microsoft YaHei"/>
+                <a:ea typeface="Microsoft YaHei"/>
+                <a:cs typeface="Microsoft YaHei"/>
+              </a:rPr>
+              <a:t>连接与断流</a:t>
+            </a:r>
+          </a:p>
+        </p:txBody>
+      </p:sp>
+      <p:sp>
+        <p:nvSpPr>
+          <p:cNvPr id="18" name="TextBox 17"/>
           <p:cNvSpPr txBox="1"/>
           <p:nvPr/>
         </p:nvSpPr>
         <p:spPr>
           <a:xfrm>
-            <a:off x="566928" y="3202228"/>
-            <a:ext cx="1289304" cy="252374"/>
+            <a:off x="2029967" y="3319272"/>
+            <a:ext cx="9518904" cy="265176"/>
           </a:xfrm>
           <a:prstGeom prst="rect">
             <a:avLst/>
@@ -5818,39 +4668,39 @@
           <a:p>
             <a:pPr algn="l">
               <a:lnSpc>
-                <a:spcPct val="112000"/>
-              </a:lnSpc>
-              <a:spcBef>
-                <a:spcPts val="0"/>
-              </a:spcBef>
-              <a:spcAft>
-                <a:spcPts val="0"/>
-              </a:spcAft>
-            </a:pPr>
-            <a:r>
-              <a:rPr sz="1470" b="1" lang="zh-CN">
-                <a:solidFill>
-                  <a:srgbClr val="205780"/>
-                </a:solidFill>
-                <a:latin typeface="Microsoft YaHei"/>
-                <a:ea typeface="Microsoft YaHei"/>
-                <a:cs typeface="Microsoft YaHei"/>
-              </a:rPr>
-              <a:t>连接与断流</a:t>
-            </a:r>
-          </a:p>
-        </p:txBody>
-      </p:sp>
-      <p:sp>
-        <p:nvSpPr>
-          <p:cNvPr id="22" name="TextBox 21"/>
+                <a:spcPct val="105000"/>
+              </a:lnSpc>
+              <a:spcBef>
+                <a:spcPts val="0"/>
+              </a:spcBef>
+              <a:spcAft>
+                <a:spcPts val="0"/>
+              </a:spcAft>
+            </a:pPr>
+            <a:r>
+              <a:rPr sz="1530" b="0" lang="zh-CN">
+                <a:solidFill>
+                  <a:srgbClr val="1B242F"/>
+                </a:solidFill>
+                <a:latin typeface="Microsoft YaHei"/>
+                <a:ea typeface="Microsoft YaHei"/>
+                <a:cs typeface="Microsoft YaHei"/>
+              </a:rPr>
+              <a:t>ReadError / ReadTimeout / RemoteProtocolError；response.failed / response.incomplete</a:t>
+            </a:r>
+          </a:p>
+        </p:txBody>
+      </p:sp>
+      <p:sp>
+        <p:nvSpPr>
+          <p:cNvPr id="19" name="TextBox 18"/>
           <p:cNvSpPr txBox="1"/>
           <p:nvPr/>
         </p:nvSpPr>
         <p:spPr>
           <a:xfrm>
-            <a:off x="1920240" y="3202228"/>
-            <a:ext cx="9710928" cy="252374"/>
+            <a:off x="676656" y="3602736"/>
+            <a:ext cx="1261872" cy="265176"/>
           </a:xfrm>
           <a:prstGeom prst="rect">
             <a:avLst/>
@@ -5865,60 +4715,39 @@
           <a:p>
             <a:pPr algn="l">
               <a:lnSpc>
-                <a:spcPct val="104000"/>
-              </a:lnSpc>
-              <a:spcBef>
-                <a:spcPts val="0"/>
-              </a:spcBef>
-              <a:spcAft>
-                <a:spcPts val="0"/>
-              </a:spcAft>
-            </a:pPr>
-            <a:r>
-              <a:rPr sz="1465" b="0" lang="zh-CN">
-                <a:solidFill>
-                  <a:srgbClr val="1B242F"/>
-                </a:solidFill>
-                <a:latin typeface="Microsoft YaHei"/>
-                <a:ea typeface="Microsoft YaHei"/>
-                <a:cs typeface="Microsoft YaHei"/>
-              </a:rPr>
-              <a:t>ReadError / ReadTimeout / RemoteProtocolError；EOF、[DONE] 结束但没有 response.completed</a:t>
-            </a:r>
-          </a:p>
-        </p:txBody>
-      </p:sp>
-      <p:cxnSp>
-        <p:nvCxnSpPr>
-          <p:cNvPr id="23" name="Connector 22"/>
-          <p:cNvCxnSpPr/>
-          <p:nvPr/>
-        </p:nvCxnSpPr>
-        <p:spPr>
-          <a:xfrm>
-            <a:off x="566928" y="3439972"/>
-            <a:ext cx="11064240" cy="0"/>
-          </a:xfrm>
-          <a:prstGeom prst="line">
-            <a:avLst/>
-          </a:prstGeom>
-          <a:ln w="5080">
-            <a:solidFill>
-              <a:srgbClr val="E5E9ED"/>
-            </a:solidFill>
-          </a:ln>
-        </p:spPr>
-      </p:cxnSp>
-      <p:sp>
-        <p:nvSpPr>
-          <p:cNvPr id="24" name="TextBox 23"/>
+                <a:spcPct val="112000"/>
+              </a:lnSpc>
+              <a:spcBef>
+                <a:spcPts val="0"/>
+              </a:spcBef>
+              <a:spcAft>
+                <a:spcPts val="0"/>
+              </a:spcAft>
+            </a:pPr>
+            <a:r>
+              <a:rPr sz="1560" b="1" lang="zh-CN">
+                <a:solidFill>
+                  <a:srgbClr val="205780"/>
+                </a:solidFill>
+                <a:latin typeface="Microsoft YaHei"/>
+                <a:ea typeface="Microsoft YaHei"/>
+                <a:cs typeface="Microsoft YaHei"/>
+              </a:rPr>
+              <a:t>请求错误</a:t>
+            </a:r>
+          </a:p>
+        </p:txBody>
+      </p:sp>
+      <p:sp>
+        <p:nvSpPr>
+          <p:cNvPr id="20" name="TextBox 19"/>
           <p:cNvSpPr txBox="1"/>
           <p:nvPr/>
         </p:nvSpPr>
         <p:spPr>
           <a:xfrm>
-            <a:off x="566928" y="3454603"/>
-            <a:ext cx="1289304" cy="252374"/>
+            <a:off x="2029967" y="3602736"/>
+            <a:ext cx="9518904" cy="265176"/>
           </a:xfrm>
           <a:prstGeom prst="rect">
             <a:avLst/>
@@ -5933,39 +4762,39 @@
           <a:p>
             <a:pPr algn="l">
               <a:lnSpc>
-                <a:spcPct val="112000"/>
-              </a:lnSpc>
-              <a:spcBef>
-                <a:spcPts val="0"/>
-              </a:spcBef>
-              <a:spcAft>
-                <a:spcPts val="0"/>
-              </a:spcAft>
-            </a:pPr>
-            <a:r>
-              <a:rPr sz="1470" b="1" lang="zh-CN">
-                <a:solidFill>
-                  <a:srgbClr val="205780"/>
-                </a:solidFill>
-                <a:latin typeface="Microsoft YaHei"/>
-                <a:ea typeface="Microsoft YaHei"/>
-                <a:cs typeface="Microsoft YaHei"/>
-              </a:rPr>
-              <a:t>流内失败</a:t>
-            </a:r>
-          </a:p>
-        </p:txBody>
-      </p:sp>
-      <p:sp>
-        <p:nvSpPr>
-          <p:cNvPr id="25" name="TextBox 24"/>
+                <a:spcPct val="105000"/>
+              </a:lnSpc>
+              <a:spcBef>
+                <a:spcPts val="0"/>
+              </a:spcBef>
+              <a:spcAft>
+                <a:spcPts val="0"/>
+              </a:spcAft>
+            </a:pPr>
+            <a:r>
+              <a:rPr sz="1530" b="0" lang="zh-CN">
+                <a:solidFill>
+                  <a:srgbClr val="1B242F"/>
+                </a:solidFill>
+                <a:latin typeface="Microsoft YaHei"/>
+                <a:ea typeface="Microsoft YaHei"/>
+                <a:cs typeface="Microsoft YaHei"/>
+              </a:rPr>
+              <a:t>context_length_exceeded / invalid_request_error / content_policy_violation</a:t>
+            </a:r>
+          </a:p>
+        </p:txBody>
+      </p:sp>
+      <p:sp>
+        <p:nvSpPr>
+          <p:cNvPr id="21" name="TextBox 20"/>
           <p:cNvSpPr txBox="1"/>
           <p:nvPr/>
         </p:nvSpPr>
         <p:spPr>
           <a:xfrm>
-            <a:off x="1920240" y="3454603"/>
-            <a:ext cx="9710928" cy="252374"/>
+            <a:off x="676656" y="4663440"/>
+            <a:ext cx="210312" cy="320040"/>
           </a:xfrm>
           <a:prstGeom prst="rect">
             <a:avLst/>
@@ -5980,17 +4809,17 @@
           <a:p>
             <a:pPr algn="l">
               <a:lnSpc>
-                <a:spcPct val="104000"/>
-              </a:lnSpc>
-              <a:spcBef>
-                <a:spcPts val="0"/>
-              </a:spcBef>
-              <a:spcAft>
-                <a:spcPts val="0"/>
-              </a:spcAft>
-            </a:pPr>
-            <a:r>
-              <a:rPr sz="1465" b="0" lang="zh-CN">
+                <a:spcPct val="112000"/>
+              </a:lnSpc>
+              <a:spcBef>
+                <a:spcPts val="0"/>
+              </a:spcBef>
+              <a:spcAft>
+                <a:spcPts val="0"/>
+              </a:spcAft>
+            </a:pPr>
+            <a:r>
+              <a:rPr sz="1920" b="0" lang="zh-CN">
                 <a:solidFill>
                   <a:srgbClr val="1B242F"/>
                 </a:solidFill>
@@ -5998,42 +4827,21 @@
                 <a:ea typeface="Microsoft YaHei"/>
                 <a:cs typeface="Microsoft YaHei"/>
               </a:rPr>
-              <a:t>HTTP 200 之后仍出现 error / response.failed / response.incomplete：上游可能已输出文本/工具参数</a:t>
-            </a:r>
-          </a:p>
-        </p:txBody>
-      </p:sp>
-      <p:cxnSp>
-        <p:nvCxnSpPr>
-          <p:cNvPr id="26" name="Connector 25"/>
-          <p:cNvCxnSpPr/>
-          <p:nvPr/>
-        </p:nvCxnSpPr>
-        <p:spPr>
-          <a:xfrm>
-            <a:off x="566928" y="3692347"/>
-            <a:ext cx="11064240" cy="0"/>
-          </a:xfrm>
-          <a:prstGeom prst="line">
-            <a:avLst/>
-          </a:prstGeom>
-          <a:ln w="5080">
-            <a:solidFill>
-              <a:srgbClr val="E5E9ED"/>
-            </a:solidFill>
-          </a:ln>
-        </p:spPr>
-      </p:cxnSp>
-      <p:sp>
-        <p:nvSpPr>
-          <p:cNvPr id="27" name="TextBox 26"/>
+              <a:t>•</a:t>
+            </a:r>
+          </a:p>
+        </p:txBody>
+      </p:sp>
+      <p:sp>
+        <p:nvSpPr>
+          <p:cNvPr id="22" name="TextBox 21"/>
           <p:cNvSpPr txBox="1"/>
           <p:nvPr/>
         </p:nvSpPr>
         <p:spPr>
           <a:xfrm>
-            <a:off x="566928" y="3706977"/>
-            <a:ext cx="1289304" cy="252374"/>
+            <a:off x="960119" y="4663440"/>
+            <a:ext cx="10588752" cy="658368"/>
           </a:xfrm>
           <a:prstGeom prst="rect">
             <a:avLst/>
@@ -6048,39 +4856,63 @@
           <a:p>
             <a:pPr algn="l">
               <a:lnSpc>
-                <a:spcPct val="112000"/>
-              </a:lnSpc>
-              <a:spcBef>
-                <a:spcPts val="0"/>
-              </a:spcBef>
-              <a:spcAft>
-                <a:spcPts val="0"/>
-              </a:spcAft>
-            </a:pPr>
-            <a:r>
-              <a:rPr sz="1470" b="1" lang="zh-CN">
-                <a:solidFill>
-                  <a:srgbClr val="205780"/>
-                </a:solidFill>
-                <a:latin typeface="Microsoft YaHei"/>
-                <a:ea typeface="Microsoft YaHei"/>
-                <a:cs typeface="Microsoft YaHei"/>
-              </a:rPr>
-              <a:t>请求与模型</a:t>
-            </a:r>
-          </a:p>
-        </p:txBody>
-      </p:sp>
-      <p:sp>
-        <p:nvSpPr>
-          <p:cNvPr id="28" name="TextBox 27"/>
+                <a:spcPct val="115000"/>
+              </a:lnSpc>
+              <a:spcBef>
+                <a:spcPts val="0"/>
+              </a:spcBef>
+              <a:spcAft>
+                <a:spcPts val="0"/>
+              </a:spcAft>
+            </a:pPr>
+            <a:r>
+              <a:rPr sz="1920" b="0" lang="zh-CN">
+                <a:solidFill>
+                  <a:srgbClr val="1B242F"/>
+                </a:solidFill>
+                <a:latin typeface="Microsoft YaHei"/>
+                <a:ea typeface="Microsoft YaHei"/>
+                <a:cs typeface="Microsoft YaHei"/>
+              </a:rPr>
+              <a:t>加一层稳定服务（Stabilizer）：先完整接收并确认响应成功，再交给 Agent；</a:t>
+            </a:r>
+          </a:p>
+          <a:p>
+            <a:pPr algn="l">
+              <a:lnSpc>
+                <a:spcPct val="115000"/>
+              </a:lnSpc>
+              <a:spcBef>
+                <a:spcPts val="0"/>
+              </a:spcBef>
+              <a:spcAft>
+                <a:spcPts val="0"/>
+              </a:spcAft>
+            </a:pPr>
+            <a:r>
+              <a:rPr sz="1920" b="0" lang="zh-CN">
+                <a:solidFill>
+                  <a:srgbClr val="1B242F"/>
+                </a:solidFill>
+                <a:latin typeface="Microsoft YaHei"/>
+                <a:ea typeface="Microsoft YaHei"/>
+                <a:cs typeface="Microsoft YaHei"/>
+              </a:rPr>
+              <a:t>中途失败的半截文本和工具调用不交付，批量任务无需逐字实时输出。</a:t>
+            </a:r>
+          </a:p>
+        </p:txBody>
+      </p:sp>
+      <p:sp>
+        <p:nvSpPr>
+          <p:cNvPr id="23" name="TextBox 22"/>
           <p:cNvSpPr txBox="1"/>
           <p:nvPr/>
         </p:nvSpPr>
         <p:spPr>
           <a:xfrm>
-            <a:off x="1920240" y="3706977"/>
-            <a:ext cx="9710928" cy="252374"/>
+            <a:off x="676656" y="5340096"/>
+            <a:ext cx="210312" cy="320040"/>
           </a:xfrm>
           <a:prstGeom prst="rect">
             <a:avLst/>
@@ -6095,17 +4927,17 @@
           <a:p>
             <a:pPr algn="l">
               <a:lnSpc>
-                <a:spcPct val="104000"/>
-              </a:lnSpc>
-              <a:spcBef>
-                <a:spcPts val="0"/>
-              </a:spcBef>
-              <a:spcAft>
-                <a:spcPts val="0"/>
-              </a:spcAft>
-            </a:pPr>
-            <a:r>
-              <a:rPr sz="1465" b="0" lang="zh-CN">
+                <a:spcPct val="112000"/>
+              </a:lnSpc>
+              <a:spcBef>
+                <a:spcPts val="0"/>
+              </a:spcBef>
+              <a:spcAft>
+                <a:spcPts val="0"/>
+              </a:spcAft>
+            </a:pPr>
+            <a:r>
+              <a:rPr sz="1920" b="0" lang="zh-CN">
                 <a:solidFill>
                   <a:srgbClr val="1B242F"/>
                 </a:solidFill>
@@ -6113,42 +4945,21 @@
                 <a:ea typeface="Microsoft YaHei"/>
                 <a:cs typeface="Microsoft YaHei"/>
               </a:rPr>
-              <a:t>context_length_exceeded / invalid_request_error / content_policy_violation；账号不支持该模型</a:t>
-            </a:r>
-          </a:p>
-        </p:txBody>
-      </p:sp>
-      <p:cxnSp>
-        <p:nvCxnSpPr>
-          <p:cNvPr id="29" name="Connector 28"/>
-          <p:cNvCxnSpPr/>
-          <p:nvPr/>
-        </p:nvCxnSpPr>
-        <p:spPr>
-          <a:xfrm>
-            <a:off x="566928" y="3944721"/>
-            <a:ext cx="11064240" cy="0"/>
-          </a:xfrm>
-          <a:prstGeom prst="line">
-            <a:avLst/>
-          </a:prstGeom>
-          <a:ln w="5080">
-            <a:solidFill>
-              <a:srgbClr val="E5E9ED"/>
-            </a:solidFill>
-          </a:ln>
-        </p:spPr>
-      </p:cxnSp>
-      <p:sp>
-        <p:nvSpPr>
-          <p:cNvPr id="30" name="TextBox 29"/>
+              <a:t>•</a:t>
+            </a:r>
+          </a:p>
+        </p:txBody>
+      </p:sp>
+      <p:sp>
+        <p:nvSpPr>
+          <p:cNvPr id="24" name="TextBox 23"/>
           <p:cNvSpPr txBox="1"/>
           <p:nvPr/>
         </p:nvSpPr>
         <p:spPr>
           <a:xfrm>
-            <a:off x="566928" y="4599432"/>
-            <a:ext cx="1197864" cy="621792"/>
+            <a:off x="960119" y="5340096"/>
+            <a:ext cx="10588752" cy="658368"/>
           </a:xfrm>
           <a:prstGeom prst="rect">
             <a:avLst/>
@@ -6163,39 +4974,63 @@
           <a:p>
             <a:pPr algn="l">
               <a:lnSpc>
-                <a:spcPct val="112000"/>
-              </a:lnSpc>
-              <a:spcBef>
-                <a:spcPts val="0"/>
-              </a:spcBef>
-              <a:spcAft>
-                <a:spcPts val="0"/>
-              </a:spcAft>
-            </a:pPr>
-            <a:r>
-              <a:rPr sz="1650" b="1" lang="zh-CN">
-                <a:solidFill>
-                  <a:srgbClr val="1F715D"/>
-                </a:solidFill>
-                <a:latin typeface="Microsoft YaHei"/>
-                <a:ea typeface="Microsoft YaHei"/>
-                <a:cs typeface="Microsoft YaHei"/>
-              </a:rPr>
-              <a:t>调用层截获</a:t>
-            </a:r>
-          </a:p>
-        </p:txBody>
-      </p:sp>
-      <p:sp>
-        <p:nvSpPr>
-          <p:cNvPr id="31" name="TextBox 30"/>
+                <a:spcPct val="115000"/>
+              </a:lnSpc>
+              <a:spcBef>
+                <a:spcPts val="0"/>
+              </a:spcBef>
+              <a:spcAft>
+                <a:spcPts val="0"/>
+              </a:spcAft>
+            </a:pPr>
+            <a:r>
+              <a:rPr sz="1920" b="0" lang="zh-CN">
+                <a:solidFill>
+                  <a:srgbClr val="1B242F"/>
+                </a:solidFill>
+                <a:latin typeface="Microsoft YaHei"/>
+                <a:ea typeface="Microsoft YaHei"/>
+                <a:cs typeface="Microsoft YaHei"/>
+              </a:rPr>
+              <a:t>按错误分类处理：过载、429、部分 5xx 和断流，限次退避重试；</a:t>
+            </a:r>
+          </a:p>
+          <a:p>
+            <a:pPr algn="l">
+              <a:lnSpc>
+                <a:spcPct val="115000"/>
+              </a:lnSpc>
+              <a:spcBef>
+                <a:spcPts val="0"/>
+              </a:spcBef>
+              <a:spcAft>
+                <a:spcPts val="0"/>
+              </a:spcAft>
+            </a:pPr>
+            <a:r>
+              <a:rPr sz="1920" b="0" lang="zh-CN">
+                <a:solidFill>
+                  <a:srgbClr val="1B242F"/>
+                </a:solidFill>
+                <a:latin typeface="Microsoft YaHei"/>
+                <a:ea typeface="Microsoft YaHei"/>
+                <a:cs typeface="Microsoft YaHei"/>
+              </a:rPr>
+              <a:t>鉴权/权限错误先修配置，上下文过长先缩减，不把所有错误都当成重试。</a:t>
+            </a:r>
+          </a:p>
+        </p:txBody>
+      </p:sp>
+      <p:sp>
+        <p:nvSpPr>
+          <p:cNvPr id="25" name="TextBox 24"/>
           <p:cNvSpPr txBox="1"/>
           <p:nvPr/>
         </p:nvSpPr>
         <p:spPr>
           <a:xfrm>
-            <a:off x="1892807" y="4599432"/>
-            <a:ext cx="9738360" cy="621792"/>
+            <a:off x="676656" y="6016752"/>
+            <a:ext cx="210312" cy="320040"/>
           </a:xfrm>
           <a:prstGeom prst="rect">
             <a:avLst/>
@@ -6220,7 +5055,7 @@
               </a:spcAft>
             </a:pPr>
             <a:r>
-              <a:rPr sz="1650" b="0" lang="zh-CN">
+              <a:rPr sz="1920" b="0" lang="zh-CN">
                 <a:solidFill>
                   <a:srgbClr val="1B242F"/>
                 </a:solidFill>
@@ -6228,45 +5063,21 @@
                 <a:ea typeface="Microsoft YaHei"/>
                 <a:cs typeface="Microsoft YaHei"/>
               </a:rPr>
-              <a:t>Stabilizer 默认完整缓存本轮 Responses：收到合法 response.completed 且正常收尾后，</a:t>
-            </a:r>
-          </a:p>
-          <a:p>
-            <a:pPr algn="l">
-              <a:lnSpc>
-                <a:spcPct val="112000"/>
-              </a:lnSpc>
-              <a:spcBef>
-                <a:spcPts val="0"/>
-              </a:spcBef>
-              <a:spcAft>
-                <a:spcPts val="0"/>
-              </a:spcAft>
-            </a:pPr>
-            <a:r>
-              <a:rPr sz="1650" b="0" lang="zh-CN">
-                <a:solidFill>
-                  <a:srgbClr val="1B242F"/>
-                </a:solidFill>
-                <a:latin typeface="Microsoft YaHei"/>
-                <a:ea typeface="Microsoft YaHei"/>
-                <a:cs typeface="Microsoft YaHei"/>
-              </a:rPr>
-              <a:t>才交付文本/工具调用；批量 Agent 任务无需“逐字直播”。</a:t>
-            </a:r>
-          </a:p>
-        </p:txBody>
-      </p:sp>
-      <p:sp>
-        <p:nvSpPr>
-          <p:cNvPr id="32" name="TextBox 31"/>
+              <a:t>•</a:t>
+            </a:r>
+          </a:p>
+        </p:txBody>
+      </p:sp>
+      <p:sp>
+        <p:nvSpPr>
+          <p:cNvPr id="26" name="TextBox 25"/>
           <p:cNvSpPr txBox="1"/>
           <p:nvPr/>
         </p:nvSpPr>
         <p:spPr>
           <a:xfrm>
-            <a:off x="566928" y="5321808"/>
-            <a:ext cx="1197864" cy="594360"/>
+            <a:off x="960119" y="6016752"/>
+            <a:ext cx="10588752" cy="658368"/>
           </a:xfrm>
           <a:prstGeom prst="rect">
             <a:avLst/>
@@ -6281,64 +5092,17 @@
           <a:p>
             <a:pPr algn="l">
               <a:lnSpc>
-                <a:spcPct val="112000"/>
-              </a:lnSpc>
-              <a:spcBef>
-                <a:spcPts val="0"/>
-              </a:spcBef>
-              <a:spcAft>
-                <a:spcPts val="0"/>
-              </a:spcAft>
-            </a:pPr>
-            <a:r>
-              <a:rPr sz="1650" b="1" lang="zh-CN">
-                <a:solidFill>
-                  <a:srgbClr val="1F715D"/>
-                </a:solidFill>
-                <a:latin typeface="Microsoft YaHei"/>
-                <a:ea typeface="Microsoft YaHei"/>
-                <a:cs typeface="Microsoft YaHei"/>
-              </a:rPr>
-              <a:t>失败先吸收</a:t>
-            </a:r>
-          </a:p>
-        </p:txBody>
-      </p:sp>
-      <p:sp>
-        <p:nvSpPr>
-          <p:cNvPr id="33" name="TextBox 32"/>
-          <p:cNvSpPr txBox="1"/>
-          <p:nvPr/>
-        </p:nvSpPr>
-        <p:spPr>
-          <a:xfrm>
-            <a:off x="1892807" y="5321808"/>
-            <a:ext cx="9738360" cy="594360"/>
-          </a:xfrm>
-          <a:prstGeom prst="rect">
-            <a:avLst/>
-          </a:prstGeom>
-          <a:noFill/>
-        </p:spPr>
-        <p:txBody>
-          <a:bodyPr wrap="square" anchor="t" lIns="0" rIns="0" tIns="0" bIns="0">
-            <a:noAutofit/>
-          </a:bodyPr>
-          <a:lstStyle/>
-          <a:p>
-            <a:pPr algn="l">
-              <a:lnSpc>
-                <a:spcPct val="112000"/>
-              </a:lnSpc>
-              <a:spcBef>
-                <a:spcPts val="0"/>
-              </a:spcBef>
-              <a:spcAft>
-                <a:spcPts val="0"/>
-              </a:spcAft>
-            </a:pPr>
-            <a:r>
-              <a:rPr sz="1650" b="0" lang="zh-CN">
+                <a:spcPct val="115000"/>
+              </a:lnSpc>
+              <a:spcBef>
+                <a:spcPts val="0"/>
+              </a:spcBef>
+              <a:spcAft>
+                <a:spcPts val="0"/>
+              </a:spcAft>
+            </a:pPr>
+            <a:r>
+              <a:rPr sz="1920" b="0" lang="zh-CN">
                 <a:solidFill>
                   <a:srgbClr val="1B242F"/>
                 </a:solidFill>
@@ -6346,23 +5110,23 @@
                 <a:ea typeface="Microsoft YaHei"/>
                 <a:cs typeface="Microsoft YaHei"/>
               </a:rPr>
-              <a:t>半截输出全部丢弃；capacity / 429 / 5xx / 断流按预算重放、必要时切账号。</a:t>
-            </a:r>
-          </a:p>
-          <a:p>
-            <a:pPr algn="l">
-              <a:lnSpc>
-                <a:spcPct val="112000"/>
-              </a:lnSpc>
-              <a:spcBef>
-                <a:spcPts val="0"/>
-              </a:spcBef>
-              <a:spcAft>
-                <a:spcPts val="0"/>
-              </a:spcAft>
-            </a:pPr>
-            <a:r>
-              <a:rPr sz="1650" b="0" lang="zh-CN">
+              <a:t>保留检查点，支持任务恢复。但仅恢复主会话时，子 Agent 仍需重启重做，</a:t>
+            </a:r>
+          </a:p>
+          <a:p>
+            <a:pPr algn="l">
+              <a:lnSpc>
+                <a:spcPct val="115000"/>
+              </a:lnSpc>
+              <a:spcBef>
+                <a:spcPts val="0"/>
+              </a:spcBef>
+              <a:spcAft>
+                <a:spcPts val="0"/>
+              </a:spcAft>
+            </a:pPr>
+            <a:r>
+              <a:rPr sz="1920" b="0" lang="zh-CN">
                 <a:solidFill>
                   <a:srgbClr val="1B242F"/>
                 </a:solidFill>
@@ -6370,148 +5134,7 @@
                 <a:ea typeface="Microsoft YaHei"/>
                 <a:cs typeface="Microsoft YaHei"/>
               </a:rPr>
-              <a:t>context_length_exceeded 等保留原码交给上层处理，不盲目重试、不伪造成功。</a:t>
-            </a:r>
-          </a:p>
-        </p:txBody>
-      </p:sp>
-      <p:sp>
-        <p:nvSpPr>
-          <p:cNvPr id="34" name="TextBox 33"/>
-          <p:cNvSpPr txBox="1"/>
-          <p:nvPr/>
-        </p:nvSpPr>
-        <p:spPr>
-          <a:xfrm>
-            <a:off x="566928" y="6044184"/>
-            <a:ext cx="1197864" cy="384048"/>
-          </a:xfrm>
-          <a:prstGeom prst="rect">
-            <a:avLst/>
-          </a:prstGeom>
-          <a:noFill/>
-        </p:spPr>
-        <p:txBody>
-          <a:bodyPr wrap="square" anchor="t" lIns="0" rIns="0" tIns="0" bIns="0">
-            <a:noAutofit/>
-          </a:bodyPr>
-          <a:lstStyle/>
-          <a:p>
-            <a:pPr algn="l">
-              <a:lnSpc>
-                <a:spcPct val="112000"/>
-              </a:lnSpc>
-              <a:spcBef>
-                <a:spcPts val="0"/>
-              </a:spcBef>
-              <a:spcAft>
-                <a:spcPts val="0"/>
-              </a:spcAft>
-            </a:pPr>
-            <a:r>
-              <a:rPr sz="1600" b="1" lang="zh-CN">
-                <a:solidFill>
-                  <a:srgbClr val="1F715D"/>
-                </a:solidFill>
-                <a:latin typeface="Microsoft YaHei"/>
-                <a:ea typeface="Microsoft YaHei"/>
-                <a:cs typeface="Microsoft YaHei"/>
-              </a:rPr>
-              <a:t>恢复仍有损</a:t>
-            </a:r>
-          </a:p>
-        </p:txBody>
-      </p:sp>
-      <p:sp>
-        <p:nvSpPr>
-          <p:cNvPr id="35" name="TextBox 34"/>
-          <p:cNvSpPr txBox="1"/>
-          <p:nvPr/>
-        </p:nvSpPr>
-        <p:spPr>
-          <a:xfrm>
-            <a:off x="1892807" y="6044184"/>
-            <a:ext cx="9738360" cy="384048"/>
-          </a:xfrm>
-          <a:prstGeom prst="rect">
-            <a:avLst/>
-          </a:prstGeom>
-          <a:noFill/>
-        </p:spPr>
-        <p:txBody>
-          <a:bodyPr wrap="square" anchor="t" lIns="0" rIns="0" tIns="0" bIns="0">
-            <a:noAutofit/>
-          </a:bodyPr>
-          <a:lstStyle/>
-          <a:p>
-            <a:pPr algn="l">
-              <a:lnSpc>
-                <a:spcPct val="112000"/>
-              </a:lnSpc>
-              <a:spcBef>
-                <a:spcPts val="0"/>
-              </a:spcBef>
-              <a:spcAft>
-                <a:spcPts val="0"/>
-              </a:spcAft>
-            </a:pPr>
-            <a:r>
-              <a:rPr sz="1600" b="0" lang="zh-CN">
-                <a:solidFill>
-                  <a:srgbClr val="1B242F"/>
-                </a:solidFill>
-                <a:latin typeface="Microsoft YaHei"/>
-                <a:ea typeface="Microsoft YaHei"/>
-                <a:cs typeface="Microsoft YaHei"/>
-              </a:rPr>
-              <a:t>Job 可恢复主 session；subagent 需重建。已保存文件仍在，未落盘的子任务上下文/结果可能丢失。</a:t>
-            </a:r>
-          </a:p>
-        </p:txBody>
-      </p:sp>
-      <p:sp>
-        <p:nvSpPr>
-          <p:cNvPr id="36" name="TextBox 35"/>
-          <p:cNvSpPr txBox="1"/>
-          <p:nvPr/>
-        </p:nvSpPr>
-        <p:spPr>
-          <a:xfrm>
-            <a:off x="566928" y="6556248"/>
-            <a:ext cx="11064240" cy="210312"/>
-          </a:xfrm>
-          <a:prstGeom prst="rect">
-            <a:avLst/>
-          </a:prstGeom>
-          <a:noFill/>
-        </p:spPr>
-        <p:txBody>
-          <a:bodyPr wrap="square" anchor="t" lIns="0" rIns="0" tIns="0" bIns="0">
-            <a:noAutofit/>
-          </a:bodyPr>
-          <a:lstStyle/>
-          <a:p>
-            <a:pPr algn="l">
-              <a:lnSpc>
-                <a:spcPct val="112000"/>
-              </a:lnSpc>
-              <a:spcBef>
-                <a:spcPts val="0"/>
-              </a:spcBef>
-              <a:spcAft>
-                <a:spcPts val="0"/>
-              </a:spcAft>
-            </a:pPr>
-            <a:r>
-              <a:rPr sz="900" b="0" lang="zh-CN">
-                <a:solidFill>
-                  <a:srgbClr val="646E79"/>
-                </a:solidFill>
-                <a:latin typeface="Microsoft YaHei"/>
-                <a:ea typeface="Microsoft YaHei"/>
-                <a:cs typeface="Microsoft YaHei"/>
-              </a:rPr>
-              <a:t>依据：健康事件截至 09-09 16:04（650 条 capacity）；main.py 分类；response_delivery.py 与测试；f757a78 默认缓冲；README 恢复边界。</a:t>
+              <a:t>未持久化的子任务上下文和结果可能丢失——恢复并不等于无损。</a:t>
             </a:r>
           </a:p>
         </p:txBody>
@@ -6550,8 +5173,8 @@
         </p:nvSpPr>
         <p:spPr>
           <a:xfrm>
-            <a:off x="566928" y="318211"/>
-            <a:ext cx="521207" cy="448056"/>
+            <a:off x="640080" y="365760"/>
+            <a:ext cx="594360" cy="548640"/>
           </a:xfrm>
           <a:prstGeom prst="rect">
             <a:avLst/>
@@ -6576,7 +5199,7 @@
               </a:spcAft>
             </a:pPr>
             <a:r>
-              <a:rPr sz="2600" b="1" lang="zh-CN">
+              <a:rPr sz="2800" b="1" lang="zh-CN">
                 <a:solidFill>
                   <a:srgbClr val="205780"/>
                 </a:solidFill>
@@ -6597,8 +5220,8 @@
         </p:nvSpPr>
         <p:spPr>
           <a:xfrm>
-            <a:off x="1307592" y="301752"/>
-            <a:ext cx="10323576" cy="484632"/>
+            <a:off x="1389888" y="356616"/>
+            <a:ext cx="10158984" cy="576072"/>
           </a:xfrm>
           <a:prstGeom prst="rect">
             <a:avLst/>
@@ -6623,29 +5246,50 @@
               </a:spcAft>
             </a:pPr>
             <a:r>
-              <a:rPr sz="2700" b="1" lang="zh-CN">
-                <a:solidFill>
-                  <a:srgbClr val="16324C"/>
-                </a:solidFill>
-                <a:latin typeface="Microsoft YaHei"/>
-                <a:ea typeface="Microsoft YaHei"/>
-                <a:cs typeface="Microsoft YaHei"/>
-              </a:rPr>
-              <a:t>目录边界会被遗忘：Skill 不能代替文件系统隔离</a:t>
-            </a:r>
-          </a:p>
-        </p:txBody>
-      </p:sp>
-      <p:sp>
-        <p:nvSpPr>
-          <p:cNvPr id="4" name="TextBox 3"/>
+              <a:rPr sz="2800" b="1" lang="zh-CN">
+                <a:solidFill>
+                  <a:srgbClr val="1B242F"/>
+                </a:solidFill>
+                <a:latin typeface="Microsoft YaHei"/>
+                <a:ea typeface="Microsoft YaHei"/>
+                <a:cs typeface="Microsoft YaHei"/>
+              </a:rPr>
+              <a:t>目录越界：写了限制，Agent 仍可能忘记</a:t>
+            </a:r>
+          </a:p>
+        </p:txBody>
+      </p:sp>
+      <p:cxnSp>
+        <p:nvCxnSpPr>
+          <p:cNvPr id="4" name="Connector 3"/>
+          <p:cNvCxnSpPr/>
+          <p:nvPr/>
+        </p:nvCxnSpPr>
+        <p:spPr>
+          <a:xfrm>
+            <a:off x="640080" y="1024128"/>
+            <a:ext cx="10908792" cy="0"/>
+          </a:xfrm>
+          <a:prstGeom prst="line">
+            <a:avLst/>
+          </a:prstGeom>
+          <a:ln w="13970">
+            <a:solidFill>
+              <a:srgbClr val="205780"/>
+            </a:solidFill>
+          </a:ln>
+        </p:spPr>
+      </p:cxnSp>
+      <p:sp>
+        <p:nvSpPr>
+          <p:cNvPr id="5" name="TextBox 4"/>
           <p:cNvSpPr txBox="1"/>
           <p:nvPr/>
         </p:nvSpPr>
         <p:spPr>
           <a:xfrm>
-            <a:off x="566928" y="923544"/>
-            <a:ext cx="11064240" cy="292608"/>
+            <a:off x="640080" y="1216152"/>
+            <a:ext cx="10908792" cy="393192"/>
           </a:xfrm>
           <a:prstGeom prst="rect">
             <a:avLst/>
@@ -6670,50 +5314,50 @@
               </a:spcAft>
             </a:pPr>
             <a:r>
-              <a:rPr sz="1610" b="0" lang="zh-CN">
-                <a:solidFill>
-                  <a:srgbClr val="646E79"/>
-                </a:solidFill>
-                <a:latin typeface="Microsoft YaHei"/>
-                <a:ea typeface="Microsoft YaHei"/>
-                <a:cs typeface="Microsoft YaHei"/>
-              </a:rPr>
-              <a:t>任务长、路径长、相似 Job 多：自然语言约束可能失效，拼错一段路径也会把读写指向错误位置。</a:t>
+              <a:rPr sz="2100" b="1" lang="zh-CN">
+                <a:solidFill>
+                  <a:srgbClr val="205780"/>
+                </a:solidFill>
+                <a:latin typeface="Microsoft YaHei"/>
+                <a:ea typeface="Microsoft YaHei"/>
+                <a:cs typeface="Microsoft YaHei"/>
+              </a:rPr>
+              <a:t>问题：</a:t>
             </a:r>
           </a:p>
         </p:txBody>
       </p:sp>
       <p:cxnSp>
         <p:nvCxnSpPr>
-          <p:cNvPr id="5" name="Connector 4"/>
+          <p:cNvPr id="6" name="Connector 5"/>
           <p:cNvCxnSpPr/>
           <p:nvPr/>
         </p:nvCxnSpPr>
         <p:spPr>
           <a:xfrm>
-            <a:off x="566928" y="1307592"/>
-            <a:ext cx="11064240" cy="0"/>
+            <a:off x="640080" y="3995928"/>
+            <a:ext cx="10908792" cy="0"/>
           </a:xfrm>
           <a:prstGeom prst="line">
             <a:avLst/>
           </a:prstGeom>
-          <a:ln w="15875">
+          <a:ln w="10160">
             <a:solidFill>
-              <a:srgbClr val="16324C"/>
+              <a:srgbClr val="CBD4DB"/>
             </a:solidFill>
           </a:ln>
         </p:spPr>
       </p:cxnSp>
       <p:sp>
         <p:nvSpPr>
-          <p:cNvPr id="6" name="TextBox 5"/>
+          <p:cNvPr id="7" name="TextBox 6"/>
           <p:cNvSpPr txBox="1"/>
           <p:nvPr/>
         </p:nvSpPr>
         <p:spPr>
           <a:xfrm>
-            <a:off x="566928" y="1463040"/>
-            <a:ext cx="4023360" cy="310896"/>
+            <a:off x="640080" y="4187952"/>
+            <a:ext cx="10908792" cy="393192"/>
           </a:xfrm>
           <a:prstGeom prst="rect">
             <a:avLst/>
@@ -6738,29 +5382,29 @@
               </a:spcAft>
             </a:pPr>
             <a:r>
-              <a:rPr sz="1800" b="1" lang="zh-CN">
-                <a:solidFill>
-                  <a:srgbClr val="205780"/>
-                </a:solidFill>
-                <a:latin typeface="Microsoft YaHei"/>
-                <a:ea typeface="Microsoft YaHei"/>
-                <a:cs typeface="Microsoft YaHei"/>
-              </a:rPr>
-              <a:t>问题与发现</a:t>
-            </a:r>
-          </a:p>
-        </p:txBody>
-      </p:sp>
-      <p:sp>
-        <p:nvSpPr>
-          <p:cNvPr id="7" name="TextBox 6"/>
+              <a:rPr sz="2100" b="1" lang="zh-CN">
+                <a:solidFill>
+                  <a:srgbClr val="1F715D"/>
+                </a:solidFill>
+                <a:latin typeface="Microsoft YaHei"/>
+                <a:ea typeface="Microsoft YaHei"/>
+                <a:cs typeface="Microsoft YaHei"/>
+              </a:rPr>
+              <a:t>解决办法：</a:t>
+            </a:r>
+          </a:p>
+        </p:txBody>
+      </p:sp>
+      <p:sp>
+        <p:nvSpPr>
+          <p:cNvPr id="8" name="TextBox 7"/>
           <p:cNvSpPr txBox="1"/>
           <p:nvPr/>
         </p:nvSpPr>
         <p:spPr>
           <a:xfrm>
-            <a:off x="4572000" y="1504188"/>
-            <a:ext cx="7059168" cy="228600"/>
+            <a:off x="676656" y="1737360"/>
+            <a:ext cx="210312" cy="320040"/>
           </a:xfrm>
           <a:prstGeom prst="rect">
             <a:avLst/>
@@ -6773,7 +5417,7 @@
           </a:bodyPr>
           <a:lstStyle/>
           <a:p>
-            <a:pPr algn="r">
+            <a:pPr algn="l">
               <a:lnSpc>
                 <a:spcPct val="112000"/>
               </a:lnSpc>
@@ -6785,40 +5429,19 @@
               </a:spcAft>
             </a:pPr>
             <a:r>
-              <a:rPr sz="1120" b="0" lang="zh-CN">
-                <a:solidFill>
-                  <a:srgbClr val="646E79"/>
-                </a:solidFill>
-                <a:latin typeface="Microsoft YaHei"/>
-                <a:ea typeface="Microsoft YaHei"/>
-                <a:cs typeface="Microsoft YaHei"/>
-              </a:rPr>
-              <a:t>同一 Job 的规则、工具调用与报错可直接对照</a:t>
-            </a:r>
-          </a:p>
-        </p:txBody>
-      </p:sp>
-      <p:cxnSp>
-        <p:nvCxnSpPr>
-          <p:cNvPr id="8" name="Connector 7"/>
-          <p:cNvCxnSpPr/>
-          <p:nvPr/>
-        </p:nvCxnSpPr>
-        <p:spPr>
-          <a:xfrm>
-            <a:off x="566928" y="4023360"/>
-            <a:ext cx="11064240" cy="0"/>
-          </a:xfrm>
-          <a:prstGeom prst="line">
-            <a:avLst/>
-          </a:prstGeom>
-          <a:ln w="11430">
-            <a:solidFill>
-              <a:srgbClr val="CBD4DB"/>
-            </a:solidFill>
-          </a:ln>
-        </p:spPr>
-      </p:cxnSp>
+              <a:rPr sz="2100" b="0" lang="zh-CN">
+                <a:solidFill>
+                  <a:srgbClr val="1B242F"/>
+                </a:solidFill>
+                <a:latin typeface="Microsoft YaHei"/>
+                <a:ea typeface="Microsoft YaHei"/>
+                <a:cs typeface="Microsoft YaHei"/>
+              </a:rPr>
+              <a:t>•</a:t>
+            </a:r>
+          </a:p>
+        </p:txBody>
+      </p:sp>
       <p:sp>
         <p:nvSpPr>
           <p:cNvPr id="9" name="TextBox 8"/>
@@ -6827,8 +5450,8 @@
         </p:nvSpPr>
         <p:spPr>
           <a:xfrm>
-            <a:off x="566928" y="4187952"/>
-            <a:ext cx="4023360" cy="310896"/>
+            <a:off x="960119" y="1737360"/>
+            <a:ext cx="10588752" cy="658368"/>
           </a:xfrm>
           <a:prstGeom prst="rect">
             <a:avLst/>
@@ -6843,25 +5466,49 @@
           <a:p>
             <a:pPr algn="l">
               <a:lnSpc>
-                <a:spcPct val="112000"/>
-              </a:lnSpc>
-              <a:spcBef>
-                <a:spcPts val="0"/>
-              </a:spcBef>
-              <a:spcAft>
-                <a:spcPts val="0"/>
-              </a:spcAft>
-            </a:pPr>
-            <a:r>
-              <a:rPr sz="1800" b="1" lang="zh-CN">
-                <a:solidFill>
-                  <a:srgbClr val="1F715D"/>
-                </a:solidFill>
-                <a:latin typeface="Microsoft YaHei"/>
-                <a:ea typeface="Microsoft YaHei"/>
-                <a:cs typeface="Microsoft YaHei"/>
-              </a:rPr>
-              <a:t>解决方案与变化</a:t>
+                <a:spcPct val="115000"/>
+              </a:lnSpc>
+              <a:spcBef>
+                <a:spcPts val="0"/>
+              </a:spcBef>
+              <a:spcAft>
+                <a:spcPts val="0"/>
+              </a:spcAft>
+            </a:pPr>
+            <a:r>
+              <a:rPr sz="2100" b="0" lang="zh-CN">
+                <a:solidFill>
+                  <a:srgbClr val="1B242F"/>
+                </a:solidFill>
+                <a:latin typeface="Microsoft YaHei"/>
+                <a:ea typeface="Microsoft YaHei"/>
+                <a:cs typeface="Microsoft YaHei"/>
+              </a:rPr>
+              <a:t>提示或 Skill 写着“只准在当前任务目录工作”，但任务一长，</a:t>
+            </a:r>
+          </a:p>
+          <a:p>
+            <a:pPr algn="l">
+              <a:lnSpc>
+                <a:spcPct val="115000"/>
+              </a:lnSpc>
+              <a:spcBef>
+                <a:spcPts val="0"/>
+              </a:spcBef>
+              <a:spcAft>
+                <a:spcPts val="0"/>
+              </a:spcAft>
+            </a:pPr>
+            <a:r>
+              <a:rPr sz="2100" b="0" lang="zh-CN">
+                <a:solidFill>
+                  <a:srgbClr val="1B242F"/>
+                </a:solidFill>
+                <a:latin typeface="Microsoft YaHei"/>
+                <a:ea typeface="Microsoft YaHei"/>
+                <a:cs typeface="Microsoft YaHei"/>
+              </a:rPr>
+              <a:t>Agent 仍可能忘记约束，去查看、参考其他任务已经生成的代码。</a:t>
             </a:r>
           </a:p>
         </p:txBody>
@@ -6874,8 +5521,8 @@
         </p:nvSpPr>
         <p:spPr>
           <a:xfrm>
-            <a:off x="4572000" y="4229100"/>
-            <a:ext cx="7059168" cy="228600"/>
+            <a:off x="676656" y="2651760"/>
+            <a:ext cx="210312" cy="320040"/>
           </a:xfrm>
           <a:prstGeom prst="rect">
             <a:avLst/>
@@ -6888,7 +5535,7 @@
           </a:bodyPr>
           <a:lstStyle/>
           <a:p>
-            <a:pPr algn="r">
+            <a:pPr algn="l">
               <a:lnSpc>
                 <a:spcPct val="112000"/>
               </a:lnSpc>
@@ -6900,15 +5547,15 @@
               </a:spcAft>
             </a:pPr>
             <a:r>
-              <a:rPr sz="1120" b="0" lang="zh-CN">
-                <a:solidFill>
-                  <a:srgbClr val="646E79"/>
-                </a:solidFill>
-                <a:latin typeface="Microsoft YaHei"/>
-                <a:ea typeface="Microsoft YaHei"/>
-                <a:cs typeface="Microsoft YaHei"/>
-              </a:rPr>
-              <a:t>已有逻辑隔离；强制访问隔离与路径护栏待落地</a:t>
+              <a:rPr sz="2100" b="0" lang="zh-CN">
+                <a:solidFill>
+                  <a:srgbClr val="1B242F"/>
+                </a:solidFill>
+                <a:latin typeface="Microsoft YaHei"/>
+                <a:ea typeface="Microsoft YaHei"/>
+                <a:cs typeface="Microsoft YaHei"/>
+              </a:rPr>
+              <a:t>•</a:t>
             </a:r>
           </a:p>
         </p:txBody>
@@ -6921,8 +5568,8 @@
         </p:nvSpPr>
         <p:spPr>
           <a:xfrm>
-            <a:off x="566928" y="1856231"/>
-            <a:ext cx="1197864" cy="576072"/>
+            <a:off x="960119" y="2651760"/>
+            <a:ext cx="10588752" cy="658368"/>
           </a:xfrm>
           <a:prstGeom prst="rect">
             <a:avLst/>
@@ -6937,25 +5584,49 @@
           <a:p>
             <a:pPr algn="l">
               <a:lnSpc>
-                <a:spcPct val="112000"/>
-              </a:lnSpc>
-              <a:spcBef>
-                <a:spcPts val="0"/>
-              </a:spcBef>
-              <a:spcAft>
-                <a:spcPts val="0"/>
-              </a:spcAft>
-            </a:pPr>
-            <a:r>
-              <a:rPr sz="1680" b="1" lang="zh-CN">
-                <a:solidFill>
-                  <a:srgbClr val="205780"/>
-                </a:solidFill>
-                <a:latin typeface="Microsoft YaHei"/>
-                <a:ea typeface="Microsoft YaHei"/>
-                <a:cs typeface="Microsoft YaHei"/>
-              </a:rPr>
-              <a:t>规则写了</a:t>
+                <a:spcPct val="115000"/>
+              </a:lnSpc>
+              <a:spcBef>
+                <a:spcPts val="0"/>
+              </a:spcBef>
+              <a:spcAft>
+                <a:spcPts val="0"/>
+              </a:spcAft>
+            </a:pPr>
+            <a:r>
+              <a:rPr sz="2100" b="0" lang="zh-CN">
+                <a:solidFill>
+                  <a:srgbClr val="1B242F"/>
+                </a:solidFill>
+                <a:latin typeface="Microsoft YaHei"/>
+                <a:ea typeface="Microsoft YaHei"/>
+                <a:cs typeface="Microsoft YaHei"/>
+              </a:rPr>
+              <a:t>路径也可能偶发漏写一段。例如应写 /work/jobs/task-a/src/，</a:t>
+            </a:r>
+          </a:p>
+          <a:p>
+            <a:pPr algn="l">
+              <a:lnSpc>
+                <a:spcPct val="115000"/>
+              </a:lnSpc>
+              <a:spcBef>
+                <a:spcPts val="0"/>
+              </a:spcBef>
+              <a:spcAft>
+                <a:spcPts val="0"/>
+              </a:spcAft>
+            </a:pPr>
+            <a:r>
+              <a:rPr sz="2100" b="0" lang="zh-CN">
+                <a:solidFill>
+                  <a:srgbClr val="1B242F"/>
+                </a:solidFill>
+                <a:latin typeface="Microsoft YaHei"/>
+                <a:ea typeface="Microsoft YaHei"/>
+                <a:cs typeface="Microsoft YaHei"/>
+              </a:rPr>
+              <a:t>却写成 /work/task-a/src/，把 jobs 这一层漏掉。</a:t>
             </a:r>
           </a:p>
         </p:txBody>
@@ -6968,8 +5639,8 @@
         </p:nvSpPr>
         <p:spPr>
           <a:xfrm>
-            <a:off x="1892807" y="1856231"/>
-            <a:ext cx="9738360" cy="576072"/>
+            <a:off x="676656" y="3502152"/>
+            <a:ext cx="210312" cy="320040"/>
           </a:xfrm>
           <a:prstGeom prst="rect">
             <a:avLst/>
@@ -6994,7 +5665,7 @@
               </a:spcAft>
             </a:pPr>
             <a:r>
-              <a:rPr sz="1680" b="0" lang="zh-CN">
+              <a:rPr sz="2000" b="0" lang="zh-CN">
                 <a:solidFill>
                   <a:srgbClr val="1B242F"/>
                 </a:solidFill>
@@ -7002,31 +5673,7 @@
                 <a:ea typeface="Microsoft YaHei"/>
                 <a:cs typeface="Microsoft YaHei"/>
               </a:rPr>
-              <a:t>Skill 明确要求只在指定 workspace 工作，禁止进入、阅读、复制其他 Job、</a:t>
-            </a:r>
-          </a:p>
-          <a:p>
-            <a:pPr algn="l">
-              <a:lnSpc>
-                <a:spcPct val="112000"/>
-              </a:lnSpc>
-              <a:spcBef>
-                <a:spcPts val="0"/>
-              </a:spcBef>
-              <a:spcAft>
-                <a:spcPts val="0"/>
-              </a:spcAft>
-            </a:pPr>
-            <a:r>
-              <a:rPr sz="1680" b="0" lang="zh-CN">
-                <a:solidFill>
-                  <a:srgbClr val="1B242F"/>
-                </a:solidFill>
-                <a:latin typeface="Microsoft YaHei"/>
-                <a:ea typeface="Microsoft YaHei"/>
-                <a:cs typeface="Microsoft YaHei"/>
-              </a:rPr>
-              <a:t>任何 cnagent-test 以及其他挂载卷结果。</a:t>
+              <a:t>•</a:t>
             </a:r>
           </a:p>
         </p:txBody>
@@ -7039,8 +5686,8 @@
         </p:nvSpPr>
         <p:spPr>
           <a:xfrm>
-            <a:off x="566928" y="2596896"/>
-            <a:ext cx="1197864" cy="640080"/>
+            <a:off x="960119" y="3502152"/>
+            <a:ext cx="10588752" cy="365760"/>
           </a:xfrm>
           <a:prstGeom prst="rect">
             <a:avLst/>
@@ -7055,25 +5702,25 @@
           <a:p>
             <a:pPr algn="l">
               <a:lnSpc>
-                <a:spcPct val="112000"/>
-              </a:lnSpc>
-              <a:spcBef>
-                <a:spcPts val="0"/>
-              </a:spcBef>
-              <a:spcAft>
-                <a:spcPts val="0"/>
-              </a:spcAft>
-            </a:pPr>
-            <a:r>
-              <a:rPr sz="1680" b="1" lang="zh-CN">
-                <a:solidFill>
-                  <a:srgbClr val="205780"/>
-                </a:solidFill>
-                <a:latin typeface="Microsoft YaHei"/>
-                <a:ea typeface="Microsoft YaHei"/>
-                <a:cs typeface="Microsoft YaHei"/>
-              </a:rPr>
-              <a:t>仍越界扫描</a:t>
+                <a:spcPct val="115000"/>
+              </a:lnSpc>
+              <a:spcBef>
+                <a:spcPts val="0"/>
+              </a:spcBef>
+              <a:spcAft>
+                <a:spcPts val="0"/>
+              </a:spcAft>
+            </a:pPr>
+            <a:r>
+              <a:rPr sz="2000" b="0" lang="zh-CN">
+                <a:solidFill>
+                  <a:srgbClr val="1B242F"/>
+                </a:solidFill>
+                <a:latin typeface="Microsoft YaHei"/>
+                <a:ea typeface="Microsoft YaHei"/>
+                <a:cs typeface="Microsoft YaHei"/>
+              </a:rPr>
+              <a:t>错误路径不存在，就报文件找不到；如果恰好存在，就可能写错位置。</a:t>
             </a:r>
           </a:p>
         </p:txBody>
@@ -7086,8 +5733,8 @@
         </p:nvSpPr>
         <p:spPr>
           <a:xfrm>
-            <a:off x="1892807" y="2596896"/>
-            <a:ext cx="9738360" cy="640080"/>
+            <a:off x="676656" y="4663440"/>
+            <a:ext cx="210312" cy="320040"/>
           </a:xfrm>
           <a:prstGeom prst="rect">
             <a:avLst/>
@@ -7112,7 +5759,7 @@
               </a:spcAft>
             </a:pPr>
             <a:r>
-              <a:rPr sz="1680" b="0" lang="zh-CN">
+              <a:rPr sz="2000" b="0" lang="zh-CN">
                 <a:solidFill>
                   <a:srgbClr val="1B242F"/>
                 </a:solidFill>
@@ -7120,31 +5767,7 @@
                 <a:ea typeface="Microsoft YaHei"/>
                 <a:cs typeface="Microsoft YaHei"/>
               </a:rPr>
-              <a:t>同一 Job 随后执行 find /workspace/volume/sto-gen2，列出其他 Job 的</a:t>
-            </a:r>
-          </a:p>
-          <a:p>
-            <a:pPr algn="l">
-              <a:lnSpc>
-                <a:spcPct val="112000"/>
-              </a:lnSpc>
-              <a:spcBef>
-                <a:spcPts val="0"/>
-              </a:spcBef>
-              <a:spcAft>
-                <a:spcPts val="0"/>
-              </a:spcAft>
-            </a:pPr>
-            <a:r>
-              <a:rPr sz="1680" b="0" lang="zh-CN">
-                <a:solidFill>
-                  <a:srgbClr val="1B242F"/>
-                </a:solidFill>
-                <a:latin typeface="Microsoft YaHei"/>
-                <a:ea typeface="Microsoft YaHei"/>
-                <a:cs typeface="Microsoft YaHei"/>
-              </a:rPr>
-              <a:t>ops/flash_attention_forward 路径：工作区之外的其他任务目录，仍然可以被扫描到。</a:t>
+              <a:t>•</a:t>
             </a:r>
           </a:p>
         </p:txBody>
@@ -7157,8 +5780,8 @@
         </p:nvSpPr>
         <p:spPr>
           <a:xfrm>
-            <a:off x="566928" y="3364992"/>
-            <a:ext cx="1197864" cy="585216"/>
+            <a:off x="960119" y="4663440"/>
+            <a:ext cx="10588752" cy="658368"/>
           </a:xfrm>
           <a:prstGeom prst="rect">
             <a:avLst/>
@@ -7173,25 +5796,49 @@
           <a:p>
             <a:pPr algn="l">
               <a:lnSpc>
-                <a:spcPct val="112000"/>
-              </a:lnSpc>
-              <a:spcBef>
-                <a:spcPts val="0"/>
-              </a:spcBef>
-              <a:spcAft>
-                <a:spcPts val="0"/>
-              </a:spcAft>
-            </a:pPr>
-            <a:r>
-              <a:rPr sz="1645" b="1" lang="zh-CN">
-                <a:solidFill>
-                  <a:srgbClr val="205780"/>
-                </a:solidFill>
-                <a:latin typeface="Microsoft YaHei"/>
-                <a:ea typeface="Microsoft YaHei"/>
-                <a:cs typeface="Microsoft YaHei"/>
-              </a:rPr>
-              <a:t>还会拼错</a:t>
+                <a:spcPct val="115000"/>
+              </a:lnSpc>
+              <a:spcBef>
+                <a:spcPts val="0"/>
+              </a:spcBef>
+              <a:spcAft>
+                <a:spcPts val="0"/>
+              </a:spcAft>
+            </a:pPr>
+            <a:r>
+              <a:rPr sz="2000" b="0" lang="zh-CN">
+                <a:solidFill>
+                  <a:srgbClr val="1B242F"/>
+                </a:solidFill>
+                <a:latin typeface="Microsoft YaHei"/>
+                <a:ea typeface="Microsoft YaHei"/>
+                <a:cs typeface="Microsoft YaHei"/>
+              </a:rPr>
+              <a:t>每个任务放入独立沙箱：只挂载自己的可写目录，公共依赖只读，</a:t>
+            </a:r>
+          </a:p>
+          <a:p>
+            <a:pPr algn="l">
+              <a:lnSpc>
+                <a:spcPct val="115000"/>
+              </a:lnSpc>
+              <a:spcBef>
+                <a:spcPts val="0"/>
+              </a:spcBef>
+              <a:spcAft>
+                <a:spcPts val="0"/>
+              </a:spcAft>
+            </a:pPr>
+            <a:r>
+              <a:rPr sz="2000" b="0" lang="zh-CN">
+                <a:solidFill>
+                  <a:srgbClr val="1B242F"/>
+                </a:solidFill>
+                <a:latin typeface="Microsoft YaHei"/>
+                <a:ea typeface="Microsoft YaHei"/>
+                <a:cs typeface="Microsoft YaHei"/>
+              </a:rPr>
+              <a:t>其他任务的目录不可见。</a:t>
             </a:r>
           </a:p>
         </p:txBody>
@@ -7204,8 +5851,8 @@
         </p:nvSpPr>
         <p:spPr>
           <a:xfrm>
-            <a:off x="1892807" y="3364992"/>
-            <a:ext cx="9738360" cy="585216"/>
+            <a:off x="676656" y="5340096"/>
+            <a:ext cx="210312" cy="320040"/>
           </a:xfrm>
           <a:prstGeom prst="rect">
             <a:avLst/>
@@ -7230,7 +5877,7 @@
               </a:spcAft>
             </a:pPr>
             <a:r>
-              <a:rPr sz="1645" b="0" lang="zh-CN">
+              <a:rPr sz="2000" b="0" lang="zh-CN">
                 <a:solidFill>
                   <a:srgbClr val="1B242F"/>
                 </a:solidFill>
@@ -7238,31 +5885,7 @@
                 <a:ea typeface="Microsoft YaHei"/>
                 <a:cs typeface="Microsoft YaHei"/>
               </a:rPr>
-              <a:t>apply_patch 将 …20260908-195756-NNn2/… 写成 …20260908-NNn2/…，</a:t>
-            </a:r>
-          </a:p>
-          <a:p>
-            <a:pPr algn="l">
-              <a:lnSpc>
-                <a:spcPct val="112000"/>
-              </a:lnSpc>
-              <a:spcBef>
-                <a:spcPts val="0"/>
-              </a:spcBef>
-              <a:spcAft>
-                <a:spcPts val="0"/>
-              </a:spcAft>
-            </a:pPr>
-            <a:r>
-              <a:rPr sz="1645" b="0" lang="zh-CN">
-                <a:solidFill>
-                  <a:srgbClr val="1B242F"/>
-                </a:solidFill>
-                <a:latin typeface="Microsoft YaHei"/>
-                <a:ea typeface="Microsoft YaHei"/>
-                <a:cs typeface="Microsoft YaHei"/>
-              </a:rPr>
-              <a:t>漏掉 195756，随即报 No such file or directory；补丁没有写入预期文件。</a:t>
+              <a:t>•</a:t>
             </a:r>
           </a:p>
         </p:txBody>
@@ -7275,8 +5898,8 @@
         </p:nvSpPr>
         <p:spPr>
           <a:xfrm>
-            <a:off x="566928" y="4599432"/>
-            <a:ext cx="1197864" cy="576072"/>
+            <a:off x="960119" y="5340096"/>
+            <a:ext cx="10588752" cy="658368"/>
           </a:xfrm>
           <a:prstGeom prst="rect">
             <a:avLst/>
@@ -7291,25 +5914,49 @@
           <a:p>
             <a:pPr algn="l">
               <a:lnSpc>
-                <a:spcPct val="112000"/>
-              </a:lnSpc>
-              <a:spcBef>
-                <a:spcPts val="0"/>
-              </a:spcBef>
-              <a:spcAft>
-                <a:spcPts val="0"/>
-              </a:spcAft>
-            </a:pPr>
-            <a:r>
-              <a:rPr sz="1660" b="1" lang="zh-CN">
-                <a:solidFill>
-                  <a:srgbClr val="1F715D"/>
-                </a:solidFill>
-                <a:latin typeface="Microsoft YaHei"/>
-                <a:ea typeface="Microsoft YaHei"/>
-                <a:cs typeface="Microsoft YaHei"/>
-              </a:rPr>
-              <a:t>已有措施</a:t>
+                <a:spcPct val="115000"/>
+              </a:lnSpc>
+              <a:spcBef>
+                <a:spcPts val="0"/>
+              </a:spcBef>
+              <a:spcAft>
+                <a:spcPts val="0"/>
+              </a:spcAft>
+            </a:pPr>
+            <a:r>
+              <a:rPr sz="2000" b="0" lang="zh-CN">
+                <a:solidFill>
+                  <a:srgbClr val="1B242F"/>
+                </a:solidFill>
+                <a:latin typeface="Microsoft YaHei"/>
+                <a:ea typeface="Microsoft YaHei"/>
+                <a:cs typeface="Microsoft YaHei"/>
+              </a:rPr>
+              <a:t>文件工具使用固定任务根目录和相对路径；校验归属、父目录与符号链接，</a:t>
+            </a:r>
+          </a:p>
+          <a:p>
+            <a:pPr algn="l">
+              <a:lnSpc>
+                <a:spcPct val="115000"/>
+              </a:lnSpc>
+              <a:spcBef>
+                <a:spcPts val="0"/>
+              </a:spcBef>
+              <a:spcAft>
+                <a:spcPts val="0"/>
+              </a:spcAft>
+            </a:pPr>
+            <a:r>
+              <a:rPr sz="2000" b="0" lang="zh-CN">
+                <a:solidFill>
+                  <a:srgbClr val="1B242F"/>
+                </a:solidFill>
+                <a:latin typeface="Microsoft YaHei"/>
+                <a:ea typeface="Microsoft YaHei"/>
+                <a:cs typeface="Microsoft YaHei"/>
+              </a:rPr>
+              <a:t>越界路径直接拒绝，检查通过后才创建目录、写入文件。</a:t>
             </a:r>
           </a:p>
         </p:txBody>
@@ -7322,8 +5969,8 @@
         </p:nvSpPr>
         <p:spPr>
           <a:xfrm>
-            <a:off x="1892807" y="4599432"/>
-            <a:ext cx="9738360" cy="576072"/>
+            <a:off x="676656" y="6016752"/>
+            <a:ext cx="210312" cy="320040"/>
           </a:xfrm>
           <a:prstGeom prst="rect">
             <a:avLst/>
@@ -7348,7 +5995,7 @@
               </a:spcAft>
             </a:pPr>
             <a:r>
-              <a:rPr sz="1660" b="0" lang="zh-CN">
+              <a:rPr sz="2000" b="0" lang="zh-CN">
                 <a:solidFill>
                   <a:srgbClr val="1B242F"/>
                 </a:solidFill>
@@ -7356,31 +6003,7 @@
                 <a:ea typeface="Microsoft YaHei"/>
                 <a:cs typeface="Microsoft YaHei"/>
               </a:rPr>
-              <a:t>每 Job 独立 workspace / HOME，再加 Skill 规则；但 Codex 仍以 --yolo 启动，</a:t>
-            </a:r>
-          </a:p>
-          <a:p>
-            <a:pPr algn="l">
-              <a:lnSpc>
-                <a:spcPct val="112000"/>
-              </a:lnSpc>
-              <a:spcBef>
-                <a:spcPts val="0"/>
-              </a:spcBef>
-              <a:spcAft>
-                <a:spcPts val="0"/>
-              </a:spcAft>
-            </a:pPr>
-            <a:r>
-              <a:rPr sz="1660" b="0" lang="zh-CN">
-                <a:solidFill>
-                  <a:srgbClr val="1B242F"/>
-                </a:solidFill>
-                <a:latin typeface="Microsoft YaHei"/>
-                <a:ea typeface="Microsoft YaHei"/>
-                <a:cs typeface="Microsoft YaHei"/>
-              </a:rPr>
-              <a:t>这只是逻辑组织，不是“只能看见和写入自己目录”的强制访问控制。</a:t>
+              <a:t>•</a:t>
             </a:r>
           </a:p>
         </p:txBody>
@@ -7393,8 +6016,8 @@
         </p:nvSpPr>
         <p:spPr>
           <a:xfrm>
-            <a:off x="566928" y="5340096"/>
-            <a:ext cx="1197864" cy="576072"/>
+            <a:off x="960119" y="6016752"/>
+            <a:ext cx="10588752" cy="658368"/>
           </a:xfrm>
           <a:prstGeom prst="rect">
             <a:avLst/>
@@ -7409,64 +6032,17 @@
           <a:p>
             <a:pPr algn="l">
               <a:lnSpc>
-                <a:spcPct val="112000"/>
-              </a:lnSpc>
-              <a:spcBef>
-                <a:spcPts val="0"/>
-              </a:spcBef>
-              <a:spcAft>
-                <a:spcPts val="0"/>
-              </a:spcAft>
-            </a:pPr>
-            <a:r>
-              <a:rPr sz="1660" b="1" lang="zh-CN">
-                <a:solidFill>
-                  <a:srgbClr val="1F715D"/>
-                </a:solidFill>
-                <a:latin typeface="Microsoft YaHei"/>
-                <a:ea typeface="Microsoft YaHei"/>
-                <a:cs typeface="Microsoft YaHei"/>
-              </a:rPr>
-              <a:t>待落地方案</a:t>
-            </a:r>
-          </a:p>
-        </p:txBody>
-      </p:sp>
-      <p:sp>
-        <p:nvSpPr>
-          <p:cNvPr id="20" name="TextBox 19"/>
-          <p:cNvSpPr txBox="1"/>
-          <p:nvPr/>
-        </p:nvSpPr>
-        <p:spPr>
-          <a:xfrm>
-            <a:off x="1892807" y="5340096"/>
-            <a:ext cx="9738360" cy="576072"/>
-          </a:xfrm>
-          <a:prstGeom prst="rect">
-            <a:avLst/>
-          </a:prstGeom>
-          <a:noFill/>
-        </p:spPr>
-        <p:txBody>
-          <a:bodyPr wrap="square" anchor="t" lIns="0" rIns="0" tIns="0" bIns="0">
-            <a:noAutofit/>
-          </a:bodyPr>
-          <a:lstStyle/>
-          <a:p>
-            <a:pPr algn="l">
-              <a:lnSpc>
-                <a:spcPct val="112000"/>
-              </a:lnSpc>
-              <a:spcBef>
-                <a:spcPts val="0"/>
-              </a:spcBef>
-              <a:spcAft>
-                <a:spcPts val="0"/>
-              </a:spcAft>
-            </a:pPr>
-            <a:r>
-              <a:rPr sz="1660" b="0" lang="zh-CN">
+                <a:spcPct val="115000"/>
+              </a:lnSpc>
+              <a:spcBef>
+                <a:spcPts val="0"/>
+              </a:spcBef>
+              <a:spcAft>
+                <a:spcPts val="0"/>
+              </a:spcAft>
+            </a:pPr>
+            <a:r>
+              <a:rPr sz="2000" b="0" lang="zh-CN">
                 <a:solidFill>
                   <a:srgbClr val="1B242F"/>
                 </a:solidFill>
@@ -7474,23 +6050,23 @@
                 <a:ea typeface="Microsoft YaHei"/>
                 <a:cs typeface="Microsoft YaHei"/>
               </a:rPr>
-              <a:t>按 Job 挂载独立可写目录，共享依赖只读；文件工具从可信 workspace 根目录定位，</a:t>
-            </a:r>
-          </a:p>
-          <a:p>
-            <a:pPr algn="l">
-              <a:lnSpc>
-                <a:spcPct val="112000"/>
-              </a:lnSpc>
-              <a:spcBef>
-                <a:spcPts val="0"/>
-              </a:spcBef>
-              <a:spcAft>
-                <a:spcPts val="0"/>
-              </a:spcAft>
-            </a:pPr>
-            <a:r>
-              <a:rPr sz="1660" b="0" lang="zh-CN">
+              <a:t>把隔离和校验做成系统强制规则：模型即使忘记提示、拼错路径，</a:t>
+            </a:r>
+          </a:p>
+          <a:p>
+            <a:pPr algn="l">
+              <a:lnSpc>
+                <a:spcPct val="115000"/>
+              </a:lnSpc>
+              <a:spcBef>
+                <a:spcPts val="0"/>
+              </a:spcBef>
+              <a:spcAft>
+                <a:spcPts val="0"/>
+              </a:spcAft>
+            </a:pPr>
+            <a:r>
+              <a:rPr sz="2000" b="0" lang="zh-CN">
                 <a:solidFill>
                   <a:srgbClr val="1B242F"/>
                 </a:solidFill>
@@ -7498,148 +6074,7 @@
                 <a:ea typeface="Microsoft YaHei"/>
                 <a:cs typeface="Microsoft YaHei"/>
               </a:rPr>
-              <a:t>接收相对路径，校验 Job ID、父目录和符号链接，拒绝跨根读写。</a:t>
-            </a:r>
-          </a:p>
-        </p:txBody>
-      </p:sp>
-      <p:sp>
-        <p:nvSpPr>
-          <p:cNvPr id="21" name="TextBox 20"/>
-          <p:cNvSpPr txBox="1"/>
-          <p:nvPr/>
-        </p:nvSpPr>
-        <p:spPr>
-          <a:xfrm>
-            <a:off x="566928" y="6089904"/>
-            <a:ext cx="1197864" cy="338328"/>
-          </a:xfrm>
-          <a:prstGeom prst="rect">
-            <a:avLst/>
-          </a:prstGeom>
-          <a:noFill/>
-        </p:spPr>
-        <p:txBody>
-          <a:bodyPr wrap="square" anchor="t" lIns="0" rIns="0" tIns="0" bIns="0">
-            <a:noAutofit/>
-          </a:bodyPr>
-          <a:lstStyle/>
-          <a:p>
-            <a:pPr algn="l">
-              <a:lnSpc>
-                <a:spcPct val="112000"/>
-              </a:lnSpc>
-              <a:spcBef>
-                <a:spcPts val="0"/>
-              </a:spcBef>
-              <a:spcAft>
-                <a:spcPts val="0"/>
-              </a:spcAft>
-            </a:pPr>
-            <a:r>
-              <a:rPr sz="1600" b="1" lang="zh-CN">
-                <a:solidFill>
-                  <a:srgbClr val="1F715D"/>
-                </a:solidFill>
-                <a:latin typeface="Microsoft YaHei"/>
-                <a:ea typeface="Microsoft YaHei"/>
-                <a:cs typeface="Microsoft YaHei"/>
-              </a:rPr>
-              <a:t>预期变化</a:t>
-            </a:r>
-          </a:p>
-        </p:txBody>
-      </p:sp>
-      <p:sp>
-        <p:nvSpPr>
-          <p:cNvPr id="22" name="TextBox 21"/>
-          <p:cNvSpPr txBox="1"/>
-          <p:nvPr/>
-        </p:nvSpPr>
-        <p:spPr>
-          <a:xfrm>
-            <a:off x="1892807" y="6089904"/>
-            <a:ext cx="9738360" cy="338328"/>
-          </a:xfrm>
-          <a:prstGeom prst="rect">
-            <a:avLst/>
-          </a:prstGeom>
-          <a:noFill/>
-        </p:spPr>
-        <p:txBody>
-          <a:bodyPr wrap="square" anchor="t" lIns="0" rIns="0" tIns="0" bIns="0">
-            <a:noAutofit/>
-          </a:bodyPr>
-          <a:lstStyle/>
-          <a:p>
-            <a:pPr algn="l">
-              <a:lnSpc>
-                <a:spcPct val="112000"/>
-              </a:lnSpc>
-              <a:spcBef>
-                <a:spcPts val="0"/>
-              </a:spcBef>
-              <a:spcAft>
-                <a:spcPts val="0"/>
-              </a:spcAft>
-            </a:pPr>
-            <a:r>
-              <a:rPr sz="1600" b="0" lang="zh-CN">
-                <a:solidFill>
-                  <a:srgbClr val="1B242F"/>
-                </a:solidFill>
-                <a:latin typeface="Microsoft YaHei"/>
-                <a:ea typeface="Microsoft YaHei"/>
-                <a:cs typeface="Microsoft YaHei"/>
-              </a:rPr>
-              <a:t>其他 Job 目录不可见，越界访问被拒绝；错 Job ID 在落盘前报错，不再依赖模型记住目录约束。</a:t>
-            </a:r>
-          </a:p>
-        </p:txBody>
-      </p:sp>
-      <p:sp>
-        <p:nvSpPr>
-          <p:cNvPr id="23" name="TextBox 22"/>
-          <p:cNvSpPr txBox="1"/>
-          <p:nvPr/>
-        </p:nvSpPr>
-        <p:spPr>
-          <a:xfrm>
-            <a:off x="566928" y="6556248"/>
-            <a:ext cx="11064240" cy="210312"/>
-          </a:xfrm>
-          <a:prstGeom prst="rect">
-            <a:avLst/>
-          </a:prstGeom>
-          <a:noFill/>
-        </p:spPr>
-        <p:txBody>
-          <a:bodyPr wrap="square" anchor="t" lIns="0" rIns="0" tIns="0" bIns="0">
-            <a:noAutofit/>
-          </a:bodyPr>
-          <a:lstStyle/>
-          <a:p>
-            <a:pPr algn="l">
-              <a:lnSpc>
-                <a:spcPct val="112000"/>
-              </a:lnSpc>
-              <a:spcBef>
-                <a:spcPts val="0"/>
-              </a:spcBef>
-              <a:spcAft>
-                <a:spcPts val="0"/>
-              </a:spcAft>
-            </a:pPr>
-            <a:r>
-              <a:rPr sz="900" b="0" lang="zh-CN">
-                <a:solidFill>
-                  <a:srgbClr val="646E79"/>
-                </a:solidFill>
-                <a:latin typeface="Microsoft YaHei"/>
-                <a:ea typeface="Microsoft YaHei"/>
-                <a:cs typeface="Microsoft YaHei"/>
-              </a:rPr>
-              <a:t>依据：Job …NNn2-cancel 原生 markdown（规则/全卷 find/漏写195756）；agent_runner Codex 启动参数。保留事实与待实施方案的边界。</a:t>
+              <a:t>也不能越过任务的读写边界。</a:t>
             </a:r>
           </a:p>
         </p:txBody>
@@ -7970,324 +6405,4 @@
   </a:objectDefaults>
   <a:extraClrSchemeLst/>
 </a:theme>
-</file>
-
-<file path=ppt/theme/theme2.xml><?xml version="1.0" encoding="utf-8"?>
-<a:theme xmlns:a="http://schemas.openxmlformats.org/drawingml/2006/main" name="Office Theme">
-  <a:themeElements>
-    <a:clrScheme name="Office">
-      <a:dk1>
-        <a:sysClr val="windowText" lastClr="000000"/>
-      </a:dk1>
-      <a:lt1>
-        <a:sysClr val="window" lastClr="FFFFFF"/>
-      </a:lt1>
-      <a:dk2>
-        <a:srgbClr val="1F497D"/>
-      </a:dk2>
-      <a:lt2>
-        <a:srgbClr val="EEECE1"/>
-      </a:lt2>
-      <a:accent1>
-        <a:srgbClr val="4F81BD"/>
-      </a:accent1>
-      <a:accent2>
-        <a:srgbClr val="C0504D"/>
-      </a:accent2>
-      <a:accent3>
-        <a:srgbClr val="9BBB59"/>
-      </a:accent3>
-      <a:accent4>
-        <a:srgbClr val="8064A2"/>
-      </a:accent4>
-      <a:accent5>
-        <a:srgbClr val="4BACC6"/>
-      </a:accent5>
-      <a:accent6>
-        <a:srgbClr val="F79646"/>
-      </a:accent6>
-      <a:hlink>
-        <a:srgbClr val="0000FF"/>
-      </a:hlink>
-      <a:folHlink>
-        <a:srgbClr val="800080"/>
-      </a:folHlink>
-    </a:clrScheme>
-    <a:fontScheme name="Microsoft YaHei">
-      <a:majorFont>
-        <a:latin typeface="Microsoft YaHei"/>
-        <a:ea typeface="Microsoft YaHei"/>
-        <a:cs typeface="Microsoft YaHei"/>
-        <a:font script="Jpan" typeface="Microsoft YaHei"/>
-        <a:font script="Hang" typeface="Microsoft YaHei"/>
-        <a:font script="Hans" typeface="Microsoft YaHei"/>
-        <a:font script="Hant" typeface="Microsoft YaHei"/>
-        <a:font script="Arab" typeface="Microsoft YaHei"/>
-        <a:font script="Hebr" typeface="Microsoft YaHei"/>
-        <a:font script="Thai" typeface="Microsoft YaHei"/>
-        <a:font script="Ethi" typeface="Microsoft YaHei"/>
-        <a:font script="Beng" typeface="Microsoft YaHei"/>
-        <a:font script="Gujr" typeface="Microsoft YaHei"/>
-        <a:font script="Khmr" typeface="Microsoft YaHei"/>
-        <a:font script="Knda" typeface="Microsoft YaHei"/>
-        <a:font script="Guru" typeface="Microsoft YaHei"/>
-        <a:font script="Cans" typeface="Microsoft YaHei"/>
-        <a:font script="Cher" typeface="Microsoft YaHei"/>
-        <a:font script="Yiii" typeface="Microsoft YaHei"/>
-        <a:font script="Tibt" typeface="Microsoft YaHei"/>
-        <a:font script="Thaa" typeface="Microsoft YaHei"/>
-        <a:font script="Deva" typeface="Microsoft YaHei"/>
-        <a:font script="Telu" typeface="Microsoft YaHei"/>
-        <a:font script="Taml" typeface="Microsoft YaHei"/>
-        <a:font script="Syrc" typeface="Microsoft YaHei"/>
-        <a:font script="Orya" typeface="Microsoft YaHei"/>
-        <a:font script="Mlym" typeface="Microsoft YaHei"/>
-        <a:font script="Laoo" typeface="Microsoft YaHei"/>
-        <a:font script="Sinh" typeface="Microsoft YaHei"/>
-        <a:font script="Mong" typeface="Microsoft YaHei"/>
-        <a:font script="Viet" typeface="Microsoft YaHei"/>
-        <a:font script="Uigh" typeface="Microsoft YaHei"/>
-        <a:font script="Geor" typeface="Microsoft YaHei"/>
-      </a:majorFont>
-      <a:minorFont>
-        <a:latin typeface="Microsoft YaHei"/>
-        <a:ea typeface="Microsoft YaHei"/>
-        <a:cs typeface="Microsoft YaHei"/>
-        <a:font script="Jpan" typeface="Microsoft YaHei"/>
-        <a:font script="Hang" typeface="Microsoft YaHei"/>
-        <a:font script="Hans" typeface="Microsoft YaHei"/>
-        <a:font script="Hant" typeface="Microsoft YaHei"/>
-        <a:font script="Arab" typeface="Microsoft YaHei"/>
-        <a:font script="Hebr" typeface="Microsoft YaHei"/>
-        <a:font script="Thai" typeface="Microsoft YaHei"/>
-        <a:font script="Ethi" typeface="Microsoft YaHei"/>
-        <a:font script="Beng" typeface="Microsoft YaHei"/>
-        <a:font script="Gujr" typeface="Microsoft YaHei"/>
-        <a:font script="Khmr" typeface="Microsoft YaHei"/>
-        <a:font script="Knda" typeface="Microsoft YaHei"/>
-        <a:font script="Guru" typeface="Microsoft YaHei"/>
-        <a:font script="Cans" typeface="Microsoft YaHei"/>
-        <a:font script="Cher" typeface="Microsoft YaHei"/>
-        <a:font script="Yiii" typeface="Microsoft YaHei"/>
-        <a:font script="Tibt" typeface="Microsoft YaHei"/>
-        <a:font script="Thaa" typeface="Microsoft YaHei"/>
-        <a:font script="Deva" typeface="Microsoft YaHei"/>
-        <a:font script="Telu" typeface="Microsoft YaHei"/>
-        <a:font script="Taml" typeface="Microsoft YaHei"/>
-        <a:font script="Syrc" typeface="Microsoft YaHei"/>
-        <a:font script="Orya" typeface="Microsoft YaHei"/>
-        <a:font script="Mlym" typeface="Microsoft YaHei"/>
-        <a:font script="Laoo" typeface="Microsoft YaHei"/>
-        <a:font script="Sinh" typeface="Microsoft YaHei"/>
-        <a:font script="Mong" typeface="Microsoft YaHei"/>
-        <a:font script="Viet" typeface="Microsoft YaHei"/>
-        <a:font script="Uigh" typeface="Microsoft YaHei"/>
-        <a:font script="Geor" typeface="Microsoft YaHei"/>
-      </a:minorFont>
-    </a:fontScheme>
-    <a:fmtScheme name="Office">
-      <a:fillStyleLst>
-        <a:solidFill>
-          <a:schemeClr val="phClr"/>
-        </a:solidFill>
-        <a:gradFill rotWithShape="1">
-          <a:gsLst>
-            <a:gs pos="0">
-              <a:schemeClr val="phClr">
-                <a:tint val="50000"/>
-                <a:satMod val="300000"/>
-              </a:schemeClr>
-            </a:gs>
-            <a:gs pos="35000">
-              <a:schemeClr val="phClr">
-                <a:tint val="37000"/>
-                <a:satMod val="300000"/>
-              </a:schemeClr>
-            </a:gs>
-            <a:gs pos="100000">
-              <a:schemeClr val="phClr">
-                <a:tint val="15000"/>
-                <a:satMod val="350000"/>
-              </a:schemeClr>
-            </a:gs>
-          </a:gsLst>
-          <a:lin ang="16200000" scaled="1"/>
-        </a:gradFill>
-        <a:gradFill rotWithShape="1">
-          <a:gsLst>
-            <a:gs pos="0">
-              <a:schemeClr val="phClr">
-                <a:tint val="100000"/>
-                <a:shade val="100000"/>
-                <a:satMod val="130000"/>
-              </a:schemeClr>
-            </a:gs>
-            <a:gs pos="100000">
-              <a:schemeClr val="phClr">
-                <a:tint val="50000"/>
-                <a:shade val="100000"/>
-                <a:satMod val="350000"/>
-              </a:schemeClr>
-            </a:gs>
-          </a:gsLst>
-          <a:lin ang="16200000" scaled="0"/>
-        </a:gradFill>
-      </a:fillStyleLst>
-      <a:lnStyleLst>
-        <a:ln w="9525" cap="flat" cmpd="sng" algn="ctr">
-          <a:solidFill>
-            <a:schemeClr val="phClr">
-              <a:shade val="95000"/>
-              <a:satMod val="105000"/>
-            </a:schemeClr>
-          </a:solidFill>
-          <a:prstDash val="solid"/>
-        </a:ln>
-        <a:ln w="25400" cap="flat" cmpd="sng" algn="ctr">
-          <a:solidFill>
-            <a:schemeClr val="phClr"/>
-          </a:solidFill>
-          <a:prstDash val="solid"/>
-        </a:ln>
-        <a:ln w="38100" cap="flat" cmpd="sng" algn="ctr">
-          <a:solidFill>
-            <a:schemeClr val="phClr"/>
-          </a:solidFill>
-          <a:prstDash val="solid"/>
-        </a:ln>
-      </a:lnStyleLst>
-      <a:effectStyleLst>
-        <a:effectStyle>
-          <a:effectLst>
-            <a:outerShdw blurRad="40000" dist="20000" dir="5400000" rotWithShape="0">
-              <a:srgbClr val="000000">
-                <a:alpha val="38000"/>
-              </a:srgbClr>
-            </a:outerShdw>
-          </a:effectLst>
-        </a:effectStyle>
-        <a:effectStyle>
-          <a:effectLst>
-            <a:outerShdw blurRad="40000" dist="23000" dir="5400000" rotWithShape="0">
-              <a:srgbClr val="000000">
-                <a:alpha val="35000"/>
-              </a:srgbClr>
-            </a:outerShdw>
-          </a:effectLst>
-        </a:effectStyle>
-        <a:effectStyle>
-          <a:effectLst>
-            <a:outerShdw blurRad="40000" dist="23000" dir="5400000" rotWithShape="0">
-              <a:srgbClr val="000000">
-                <a:alpha val="35000"/>
-              </a:srgbClr>
-            </a:outerShdw>
-          </a:effectLst>
-          <a:scene3d>
-            <a:camera prst="orthographicFront">
-              <a:rot lat="0" lon="0" rev="0"/>
-            </a:camera>
-            <a:lightRig rig="threePt" dir="t">
-              <a:rot lat="0" lon="0" rev="1200000"/>
-            </a:lightRig>
-          </a:scene3d>
-          <a:sp3d>
-            <a:bevelT w="63500" h="25400"/>
-          </a:sp3d>
-        </a:effectStyle>
-      </a:effectStyleLst>
-      <a:bgFillStyleLst>
-        <a:solidFill>
-          <a:schemeClr val="phClr"/>
-        </a:solidFill>
-        <a:gradFill rotWithShape="1">
-          <a:gsLst>
-            <a:gs pos="0">
-              <a:schemeClr val="phClr">
-                <a:tint val="40000"/>
-                <a:satMod val="350000"/>
-              </a:schemeClr>
-            </a:gs>
-            <a:gs pos="40000">
-              <a:schemeClr val="phClr">
-                <a:tint val="45000"/>
-                <a:shade val="99000"/>
-                <a:satMod val="350000"/>
-              </a:schemeClr>
-            </a:gs>
-            <a:gs pos="100000">
-              <a:schemeClr val="phClr">
-                <a:shade val="20000"/>
-                <a:satMod val="255000"/>
-              </a:schemeClr>
-            </a:gs>
-          </a:gsLst>
-          <a:path path="circle">
-            <a:fillToRect l="50000" t="-80000" r="50000" b="180000"/>
-          </a:path>
-        </a:gradFill>
-        <a:gradFill rotWithShape="1">
-          <a:gsLst>
-            <a:gs pos="0">
-              <a:schemeClr val="phClr">
-                <a:tint val="80000"/>
-                <a:satMod val="300000"/>
-              </a:schemeClr>
-            </a:gs>
-            <a:gs pos="100000">
-              <a:schemeClr val="phClr">
-                <a:shade val="30000"/>
-                <a:satMod val="200000"/>
-              </a:schemeClr>
-            </a:gs>
-          </a:gsLst>
-          <a:path path="circle">
-            <a:fillToRect l="50000" t="50000" r="50000" b="50000"/>
-          </a:path>
-        </a:gradFill>
-      </a:bgFillStyleLst>
-    </a:fmtScheme>
-  </a:themeElements>
-  <a:objectDefaults>
-    <a:spDef>
-      <a:spPr/>
-      <a:bodyPr/>
-      <a:lstStyle/>
-      <a:style>
-        <a:lnRef idx="1">
-          <a:schemeClr val="accent1"/>
-        </a:lnRef>
-        <a:fillRef idx="3">
-          <a:schemeClr val="accent1"/>
-        </a:fillRef>
-        <a:effectRef idx="2">
-          <a:schemeClr val="accent1"/>
-        </a:effectRef>
-        <a:fontRef idx="minor">
-          <a:schemeClr val="lt1"/>
-        </a:fontRef>
-      </a:style>
-    </a:spDef>
-    <a:lnDef>
-      <a:spPr/>
-      <a:bodyPr/>
-      <a:lstStyle/>
-      <a:style>
-        <a:lnRef idx="2">
-          <a:schemeClr val="accent1"/>
-        </a:lnRef>
-        <a:fillRef idx="0">
-          <a:schemeClr val="accent1"/>
-        </a:fillRef>
-        <a:effectRef idx="1">
-          <a:schemeClr val="accent1"/>
-        </a:effectRef>
-        <a:fontRef idx="minor">
-          <a:schemeClr val="tx1"/>
-        </a:fontRef>
-      </a:style>
-    </a:lnDef>
-  </a:objectDefaults>
-  <a:extraClrSchemeLst/>
-</a:theme>
 </file>